--- a/Presentazione_07_09.pptx
+++ b/Presentazione_07_09.pptx
@@ -7,19 +7,23 @@
     <p:sldMasterId id="2147483682" r:id="rId6"/>
   </p:sldMasterIdLst>
   <p:notesMasterIdLst>
-    <p:notesMasterId r:id="rId17"/>
+    <p:notesMasterId r:id="rId21"/>
   </p:notesMasterIdLst>
   <p:sldIdLst>
     <p:sldId id="257" r:id="rId7"/>
     <p:sldId id="325" r:id="rId8"/>
     <p:sldId id="312" r:id="rId9"/>
-    <p:sldId id="322" r:id="rId10"/>
-    <p:sldId id="329" r:id="rId11"/>
-    <p:sldId id="328" r:id="rId12"/>
-    <p:sldId id="316" r:id="rId13"/>
-    <p:sldId id="324" r:id="rId14"/>
-    <p:sldId id="327" r:id="rId15"/>
-    <p:sldId id="298" r:id="rId16"/>
+    <p:sldId id="330" r:id="rId10"/>
+    <p:sldId id="331" r:id="rId11"/>
+    <p:sldId id="332" r:id="rId12"/>
+    <p:sldId id="333" r:id="rId13"/>
+    <p:sldId id="334" r:id="rId14"/>
+    <p:sldId id="335" r:id="rId15"/>
+    <p:sldId id="336" r:id="rId16"/>
+    <p:sldId id="337" r:id="rId17"/>
+    <p:sldId id="322" r:id="rId18"/>
+    <p:sldId id="329" r:id="rId19"/>
+    <p:sldId id="298" r:id="rId20"/>
   </p:sldIdLst>
   <p:sldSz cx="12192000" cy="6858000"/>
   <p:notesSz cx="6858000" cy="9144000"/>
@@ -241,7 +245,7 @@
           <a:p>
             <a:fld id="{71531CDF-70D6-4AEF-91E2-1A078360BAF5}" type="datetimeFigureOut">
               <a:rPr lang="it-IT" smtClean="0"/>
-              <a:t>28/08/2026</a:t>
+              <a:t>31/08/2026</a:t>
             </a:fld>
             <a:endParaRPr lang="it-IT"/>
           </a:p>
@@ -3523,7 +3527,7 @@
           <a:p>
             <a:fld id="{0AAAF750-697A-42EE-BA8B-A382A30B9D4A}" type="datetimeFigureOut">
               <a:rPr lang="en-GB" smtClean="0"/>
-              <a:t>28/08/2026</a:t>
+              <a:t>31/08/2026</a:t>
             </a:fld>
             <a:endParaRPr lang="en-GB"/>
           </a:p>
@@ -3723,7 +3727,7 @@
           <a:p>
             <a:fld id="{0AAAF750-697A-42EE-BA8B-A382A30B9D4A}" type="datetimeFigureOut">
               <a:rPr lang="en-GB" smtClean="0"/>
-              <a:t>28/08/2026</a:t>
+              <a:t>31/08/2026</a:t>
             </a:fld>
             <a:endParaRPr lang="en-GB"/>
           </a:p>
@@ -3999,7 +4003,7 @@
           <a:p>
             <a:fld id="{0AAAF750-697A-42EE-BA8B-A382A30B9D4A}" type="datetimeFigureOut">
               <a:rPr lang="en-GB" smtClean="0"/>
-              <a:t>28/08/2026</a:t>
+              <a:t>31/08/2026</a:t>
             </a:fld>
             <a:endParaRPr lang="en-GB"/>
           </a:p>
@@ -4267,7 +4271,7 @@
           <a:p>
             <a:fld id="{0AAAF750-697A-42EE-BA8B-A382A30B9D4A}" type="datetimeFigureOut">
               <a:rPr lang="en-GB" smtClean="0"/>
-              <a:t>28/08/2026</a:t>
+              <a:t>31/08/2026</a:t>
             </a:fld>
             <a:endParaRPr lang="en-GB"/>
           </a:p>
@@ -4682,7 +4686,7 @@
           <a:p>
             <a:fld id="{0AAAF750-697A-42EE-BA8B-A382A30B9D4A}" type="datetimeFigureOut">
               <a:rPr lang="en-GB" smtClean="0"/>
-              <a:t>28/08/2026</a:t>
+              <a:t>31/08/2026</a:t>
             </a:fld>
             <a:endParaRPr lang="en-GB"/>
           </a:p>
@@ -4824,7 +4828,7 @@
           <a:p>
             <a:fld id="{0AAAF750-697A-42EE-BA8B-A382A30B9D4A}" type="datetimeFigureOut">
               <a:rPr lang="en-GB" smtClean="0"/>
-              <a:t>28/08/2026</a:t>
+              <a:t>31/08/2026</a:t>
             </a:fld>
             <a:endParaRPr lang="en-GB"/>
           </a:p>
@@ -4937,7 +4941,7 @@
           <a:p>
             <a:fld id="{0AAAF750-697A-42EE-BA8B-A382A30B9D4A}" type="datetimeFigureOut">
               <a:rPr lang="en-GB" smtClean="0"/>
-              <a:t>28/08/2026</a:t>
+              <a:t>31/08/2026</a:t>
             </a:fld>
             <a:endParaRPr lang="en-GB"/>
           </a:p>
@@ -5250,7 +5254,7 @@
           <a:p>
             <a:fld id="{0AAAF750-697A-42EE-BA8B-A382A30B9D4A}" type="datetimeFigureOut">
               <a:rPr lang="en-GB" smtClean="0"/>
-              <a:t>28/08/2026</a:t>
+              <a:t>31/08/2026</a:t>
             </a:fld>
             <a:endParaRPr lang="en-GB"/>
           </a:p>
@@ -5539,7 +5543,7 @@
           <a:p>
             <a:fld id="{0AAAF750-697A-42EE-BA8B-A382A30B9D4A}" type="datetimeFigureOut">
               <a:rPr lang="en-GB" smtClean="0"/>
-              <a:t>28/08/2026</a:t>
+              <a:t>31/08/2026</a:t>
             </a:fld>
             <a:endParaRPr lang="en-GB"/>
           </a:p>
@@ -5739,7 +5743,7 @@
           <a:p>
             <a:fld id="{0AAAF750-697A-42EE-BA8B-A382A30B9D4A}" type="datetimeFigureOut">
               <a:rPr lang="en-GB" smtClean="0"/>
-              <a:t>28/08/2026</a:t>
+              <a:t>31/08/2026</a:t>
             </a:fld>
             <a:endParaRPr lang="en-GB"/>
           </a:p>
@@ -6278,7 +6282,7 @@
           <a:p>
             <a:fld id="{0AAAF750-697A-42EE-BA8B-A382A30B9D4A}" type="datetimeFigureOut">
               <a:rPr lang="en-GB" smtClean="0"/>
-              <a:t>28/08/2026</a:t>
+              <a:t>31/08/2026</a:t>
             </a:fld>
             <a:endParaRPr lang="en-GB"/>
           </a:p>
@@ -8321,7 +8325,7 @@
           <a:p>
             <a:fld id="{0AAAF750-697A-42EE-BA8B-A382A30B9D4A}" type="datetimeFigureOut">
               <a:rPr lang="en-GB" smtClean="0"/>
-              <a:t>28/08/2026</a:t>
+              <a:t>31/08/2026</a:t>
             </a:fld>
             <a:endParaRPr lang="en-GB"/>
           </a:p>
@@ -9621,6 +9625,481 @@
       </p:grpSpPr>
       <p:sp>
         <p:nvSpPr>
+          <p:cNvPr id="2" name="Titolo 1">
+            <a:extLst>
+              <a:ext uri="{FF2B5EF4-FFF2-40B4-BE49-F238E27FC236}">
+                <a16:creationId xmlns:a16="http://schemas.microsoft.com/office/drawing/2014/main" id="{2937A81E-F205-E586-B44C-211579A5C77D}"/>
+              </a:ext>
+            </a:extLst>
+          </p:cNvPr>
+          <p:cNvSpPr>
+            <a:spLocks noGrp="1"/>
+          </p:cNvSpPr>
+          <p:nvPr>
+            <p:ph type="title"/>
+          </p:nvPr>
+        </p:nvSpPr>
+        <p:spPr/>
+        <p:txBody>
+          <a:bodyPr/>
+          <a:lstStyle/>
+          <a:p>
+            <a:r>
+              <a:rPr lang="it-IT" dirty="0"/>
+              <a:t>Sensing lavori 4 piano</a:t>
+            </a:r>
+          </a:p>
+        </p:txBody>
+      </p:sp>
+      <p:sp>
+        <p:nvSpPr>
+          <p:cNvPr id="3" name="Segnaposto contenuto 2">
+            <a:extLst>
+              <a:ext uri="{FF2B5EF4-FFF2-40B4-BE49-F238E27FC236}">
+                <a16:creationId xmlns:a16="http://schemas.microsoft.com/office/drawing/2014/main" id="{4FAAB8A8-4C6E-857D-F91B-D496DE51D63C}"/>
+              </a:ext>
+            </a:extLst>
+          </p:cNvPr>
+          <p:cNvSpPr>
+            <a:spLocks noGrp="1"/>
+          </p:cNvSpPr>
+          <p:nvPr>
+            <p:ph idx="1"/>
+          </p:nvPr>
+        </p:nvSpPr>
+        <p:spPr/>
+        <p:txBody>
+          <a:bodyPr/>
+          <a:lstStyle/>
+          <a:p>
+            <a:endParaRPr lang="it-IT"/>
+          </a:p>
+        </p:txBody>
+      </p:sp>
+    </p:spTree>
+    <p:extLst>
+      <p:ext uri="{BB962C8B-B14F-4D97-AF65-F5344CB8AC3E}">
+        <p14:creationId xmlns:p14="http://schemas.microsoft.com/office/powerpoint/2010/main" val="2635465820"/>
+      </p:ext>
+    </p:extLst>
+  </p:cSld>
+  <p:clrMapOvr>
+    <a:masterClrMapping/>
+  </p:clrMapOvr>
+</p:sld>
+</file>
+
+<file path=ppt/slides/slide11.xml><?xml version="1.0" encoding="utf-8"?>
+<p:sld xmlns:a="http://schemas.openxmlformats.org/drawingml/2006/main" xmlns:r="http://schemas.openxmlformats.org/officeDocument/2006/relationships" xmlns:p="http://schemas.openxmlformats.org/presentationml/2006/main">
+  <p:cSld>
+    <p:spTree>
+      <p:nvGrpSpPr>
+        <p:cNvPr id="1" name=""/>
+        <p:cNvGrpSpPr/>
+        <p:nvPr/>
+      </p:nvGrpSpPr>
+      <p:grpSpPr>
+        <a:xfrm>
+          <a:off x="0" y="0"/>
+          <a:ext cx="0" cy="0"/>
+          <a:chOff x="0" y="0"/>
+          <a:chExt cx="0" cy="0"/>
+        </a:xfrm>
+      </p:grpSpPr>
+      <p:sp>
+        <p:nvSpPr>
+          <p:cNvPr id="2" name="Titolo 1">
+            <a:extLst>
+              <a:ext uri="{FF2B5EF4-FFF2-40B4-BE49-F238E27FC236}">
+                <a16:creationId xmlns:a16="http://schemas.microsoft.com/office/drawing/2014/main" id="{B194CA4F-9647-0712-D4E2-721054D2C9DE}"/>
+              </a:ext>
+            </a:extLst>
+          </p:cNvPr>
+          <p:cNvSpPr>
+            <a:spLocks noGrp="1"/>
+          </p:cNvSpPr>
+          <p:nvPr>
+            <p:ph type="title"/>
+          </p:nvPr>
+        </p:nvSpPr>
+        <p:spPr/>
+        <p:txBody>
+          <a:bodyPr/>
+          <a:lstStyle/>
+          <a:p>
+            <a:r>
+              <a:rPr lang="it-IT" dirty="0"/>
+              <a:t>terremoto?</a:t>
+            </a:r>
+          </a:p>
+        </p:txBody>
+      </p:sp>
+      <p:sp>
+        <p:nvSpPr>
+          <p:cNvPr id="3" name="Segnaposto contenuto 2">
+            <a:extLst>
+              <a:ext uri="{FF2B5EF4-FFF2-40B4-BE49-F238E27FC236}">
+                <a16:creationId xmlns:a16="http://schemas.microsoft.com/office/drawing/2014/main" id="{AC2384BA-1A9F-CCCA-CB2F-B050E00EC90C}"/>
+              </a:ext>
+            </a:extLst>
+          </p:cNvPr>
+          <p:cNvSpPr>
+            <a:spLocks noGrp="1"/>
+          </p:cNvSpPr>
+          <p:nvPr>
+            <p:ph idx="1"/>
+          </p:nvPr>
+        </p:nvSpPr>
+        <p:spPr/>
+        <p:txBody>
+          <a:bodyPr/>
+          <a:lstStyle/>
+          <a:p>
+            <a:endParaRPr lang="it-IT"/>
+          </a:p>
+        </p:txBody>
+      </p:sp>
+    </p:spTree>
+    <p:extLst>
+      <p:ext uri="{BB962C8B-B14F-4D97-AF65-F5344CB8AC3E}">
+        <p14:creationId xmlns:p14="http://schemas.microsoft.com/office/powerpoint/2010/main" val="577277101"/>
+      </p:ext>
+    </p:extLst>
+  </p:cSld>
+  <p:clrMapOvr>
+    <a:masterClrMapping/>
+  </p:clrMapOvr>
+</p:sld>
+</file>
+
+<file path=ppt/slides/slide12.xml><?xml version="1.0" encoding="utf-8"?>
+<p:sld xmlns:a="http://schemas.openxmlformats.org/drawingml/2006/main" xmlns:r="http://schemas.openxmlformats.org/officeDocument/2006/relationships" xmlns:p="http://schemas.openxmlformats.org/presentationml/2006/main">
+  <p:cSld>
+    <p:spTree>
+      <p:nvGrpSpPr>
+        <p:cNvPr id="1" name="">
+          <a:extLst>
+            <a:ext uri="{FF2B5EF4-FFF2-40B4-BE49-F238E27FC236}">
+              <a16:creationId xmlns:a16="http://schemas.microsoft.com/office/drawing/2014/main" id="{1F630A85-8C66-988D-E25C-0C5D1C1014C9}"/>
+            </a:ext>
+          </a:extLst>
+        </p:cNvPr>
+        <p:cNvGrpSpPr/>
+        <p:nvPr/>
+      </p:nvGrpSpPr>
+      <p:grpSpPr>
+        <a:xfrm>
+          <a:off x="0" y="0"/>
+          <a:ext cx="0" cy="0"/>
+          <a:chOff x="0" y="0"/>
+          <a:chExt cx="0" cy="0"/>
+        </a:xfrm>
+      </p:grpSpPr>
+      <p:sp>
+        <p:nvSpPr>
+          <p:cNvPr id="10" name="Titolo 1">
+            <a:extLst>
+              <a:ext uri="{FF2B5EF4-FFF2-40B4-BE49-F238E27FC236}">
+                <a16:creationId xmlns:a16="http://schemas.microsoft.com/office/drawing/2014/main" id="{351995F4-C6D7-B83A-6ECA-DDDFA79AD6C9}"/>
+              </a:ext>
+            </a:extLst>
+          </p:cNvPr>
+          <p:cNvSpPr>
+            <a:spLocks noGrp="1"/>
+          </p:cNvSpPr>
+          <p:nvPr>
+            <p:ph type="title"/>
+          </p:nvPr>
+        </p:nvSpPr>
+        <p:spPr>
+          <a:xfrm>
+            <a:off x="266400" y="180000"/>
+            <a:ext cx="11664950" cy="1080000"/>
+          </a:xfrm>
+        </p:spPr>
+        <p:txBody>
+          <a:bodyPr/>
+          <a:lstStyle/>
+          <a:p>
+            <a:r>
+              <a:rPr lang="it-IT" dirty="0"/>
+              <a:t>SOP ATE = 4 - 1 kHz</a:t>
+            </a:r>
+          </a:p>
+        </p:txBody>
+      </p:sp>
+      <p:sp>
+        <p:nvSpPr>
+          <p:cNvPr id="8" name="CasellaDiTesto 7">
+            <a:extLst>
+              <a:ext uri="{FF2B5EF4-FFF2-40B4-BE49-F238E27FC236}">
+                <a16:creationId xmlns:a16="http://schemas.microsoft.com/office/drawing/2014/main" id="{EF2FAF30-5D79-073C-E9E1-140C05643B4F}"/>
+              </a:ext>
+            </a:extLst>
+          </p:cNvPr>
+          <p:cNvSpPr txBox="1"/>
+          <p:nvPr/>
+        </p:nvSpPr>
+        <p:spPr>
+          <a:xfrm>
+            <a:off x="5920740" y="6434160"/>
+            <a:ext cx="541020" cy="369332"/>
+          </a:xfrm>
+          <a:prstGeom prst="rect">
+            <a:avLst/>
+          </a:prstGeom>
+          <a:noFill/>
+        </p:spPr>
+        <p:txBody>
+          <a:bodyPr wrap="square" rtlCol="0">
+            <a:spAutoFit/>
+          </a:bodyPr>
+          <a:lstStyle/>
+          <a:p>
+            <a:r>
+              <a:rPr lang="en-GB" dirty="0">
+                <a:solidFill>
+                  <a:schemeClr val="bg1"/>
+                </a:solidFill>
+              </a:rPr>
+              <a:t>12</a:t>
+            </a:r>
+          </a:p>
+        </p:txBody>
+      </p:sp>
+      <p:pic>
+        <p:nvPicPr>
+          <p:cNvPr id="4" name="Immagine 3">
+            <a:extLst>
+              <a:ext uri="{FF2B5EF4-FFF2-40B4-BE49-F238E27FC236}">
+                <a16:creationId xmlns:a16="http://schemas.microsoft.com/office/drawing/2014/main" id="{30F82671-95A2-0728-4C8D-BFF13A41C640}"/>
+              </a:ext>
+            </a:extLst>
+          </p:cNvPr>
+          <p:cNvPicPr>
+            <a:picLocks noChangeAspect="1"/>
+          </p:cNvPicPr>
+          <p:nvPr/>
+        </p:nvPicPr>
+        <p:blipFill>
+          <a:blip r:embed="rId2">
+            <a:clrChange>
+              <a:clrFrom>
+                <a:srgbClr val="FFFFFF"/>
+              </a:clrFrom>
+              <a:clrTo>
+                <a:srgbClr val="FFFFFF">
+                  <a:alpha val="0"/>
+                </a:srgbClr>
+              </a:clrTo>
+            </a:clrChange>
+            <a:extLst>
+              <a:ext uri="{28A0092B-C50C-407E-A947-70E740481C1C}">
+                <a14:useLocalDpi xmlns:a14="http://schemas.microsoft.com/office/drawing/2010/main" val="0"/>
+              </a:ext>
+            </a:extLst>
+          </a:blip>
+          <a:stretch>
+            <a:fillRect/>
+          </a:stretch>
+        </p:blipFill>
+        <p:spPr>
+          <a:xfrm>
+            <a:off x="359312" y="651182"/>
+            <a:ext cx="11122855" cy="5555635"/>
+          </a:xfrm>
+          <a:prstGeom prst="rect">
+            <a:avLst/>
+          </a:prstGeom>
+        </p:spPr>
+      </p:pic>
+    </p:spTree>
+    <p:extLst>
+      <p:ext uri="{BB962C8B-B14F-4D97-AF65-F5344CB8AC3E}">
+        <p14:creationId xmlns:p14="http://schemas.microsoft.com/office/powerpoint/2010/main" val="2649181556"/>
+      </p:ext>
+    </p:extLst>
+  </p:cSld>
+  <p:clrMapOvr>
+    <a:masterClrMapping/>
+  </p:clrMapOvr>
+</p:sld>
+</file>
+
+<file path=ppt/slides/slide13.xml><?xml version="1.0" encoding="utf-8"?>
+<p:sld xmlns:a="http://schemas.openxmlformats.org/drawingml/2006/main" xmlns:r="http://schemas.openxmlformats.org/officeDocument/2006/relationships" xmlns:p="http://schemas.openxmlformats.org/presentationml/2006/main">
+  <p:cSld>
+    <p:spTree>
+      <p:nvGrpSpPr>
+        <p:cNvPr id="1" name="">
+          <a:extLst>
+            <a:ext uri="{FF2B5EF4-FFF2-40B4-BE49-F238E27FC236}">
+              <a16:creationId xmlns:a16="http://schemas.microsoft.com/office/drawing/2014/main" id="{5F6FCE80-537A-40E3-B804-31B95159052B}"/>
+            </a:ext>
+          </a:extLst>
+        </p:cNvPr>
+        <p:cNvGrpSpPr/>
+        <p:nvPr/>
+      </p:nvGrpSpPr>
+      <p:grpSpPr>
+        <a:xfrm>
+          <a:off x="0" y="0"/>
+          <a:ext cx="0" cy="0"/>
+          <a:chOff x="0" y="0"/>
+          <a:chExt cx="0" cy="0"/>
+        </a:xfrm>
+      </p:grpSpPr>
+      <p:sp>
+        <p:nvSpPr>
+          <p:cNvPr id="10" name="Titolo 1">
+            <a:extLst>
+              <a:ext uri="{FF2B5EF4-FFF2-40B4-BE49-F238E27FC236}">
+                <a16:creationId xmlns:a16="http://schemas.microsoft.com/office/drawing/2014/main" id="{316D60DC-CB63-6020-36F6-D12B004F5EAE}"/>
+              </a:ext>
+            </a:extLst>
+          </p:cNvPr>
+          <p:cNvSpPr>
+            <a:spLocks noGrp="1"/>
+          </p:cNvSpPr>
+          <p:nvPr>
+            <p:ph type="title"/>
+          </p:nvPr>
+        </p:nvSpPr>
+        <p:spPr>
+          <a:xfrm>
+            <a:off x="266400" y="180000"/>
+            <a:ext cx="11664950" cy="1080000"/>
+          </a:xfrm>
+        </p:spPr>
+        <p:txBody>
+          <a:bodyPr/>
+          <a:lstStyle/>
+          <a:p>
+            <a:r>
+              <a:rPr lang="it-IT" dirty="0"/>
+              <a:t>SOP ATE = 4 - 100 Hz</a:t>
+            </a:r>
+          </a:p>
+        </p:txBody>
+      </p:sp>
+      <p:sp>
+        <p:nvSpPr>
+          <p:cNvPr id="8" name="CasellaDiTesto 7">
+            <a:extLst>
+              <a:ext uri="{FF2B5EF4-FFF2-40B4-BE49-F238E27FC236}">
+                <a16:creationId xmlns:a16="http://schemas.microsoft.com/office/drawing/2014/main" id="{100BD6A8-1345-B730-AE3F-17A142CF8F79}"/>
+              </a:ext>
+            </a:extLst>
+          </p:cNvPr>
+          <p:cNvSpPr txBox="1"/>
+          <p:nvPr/>
+        </p:nvSpPr>
+        <p:spPr>
+          <a:xfrm>
+            <a:off x="5920740" y="6434160"/>
+            <a:ext cx="541020" cy="369332"/>
+          </a:xfrm>
+          <a:prstGeom prst="rect">
+            <a:avLst/>
+          </a:prstGeom>
+          <a:noFill/>
+        </p:spPr>
+        <p:txBody>
+          <a:bodyPr wrap="square" rtlCol="0">
+            <a:spAutoFit/>
+          </a:bodyPr>
+          <a:lstStyle/>
+          <a:p>
+            <a:r>
+              <a:rPr lang="en-GB" dirty="0">
+                <a:solidFill>
+                  <a:schemeClr val="bg1"/>
+                </a:solidFill>
+              </a:rPr>
+              <a:t>12</a:t>
+            </a:r>
+          </a:p>
+        </p:txBody>
+      </p:sp>
+      <p:pic>
+        <p:nvPicPr>
+          <p:cNvPr id="3" name="Immagine 2">
+            <a:extLst>
+              <a:ext uri="{FF2B5EF4-FFF2-40B4-BE49-F238E27FC236}">
+                <a16:creationId xmlns:a16="http://schemas.microsoft.com/office/drawing/2014/main" id="{40EEA688-24E2-9230-B82E-E8E0EE58B316}"/>
+              </a:ext>
+            </a:extLst>
+          </p:cNvPr>
+          <p:cNvPicPr>
+            <a:picLocks noChangeAspect="1"/>
+          </p:cNvPicPr>
+          <p:nvPr/>
+        </p:nvPicPr>
+        <p:blipFill>
+          <a:blip r:embed="rId2">
+            <a:clrChange>
+              <a:clrFrom>
+                <a:srgbClr val="FFFFFF"/>
+              </a:clrFrom>
+              <a:clrTo>
+                <a:srgbClr val="FFFFFF">
+                  <a:alpha val="0"/>
+                </a:srgbClr>
+              </a:clrTo>
+            </a:clrChange>
+            <a:extLst>
+              <a:ext uri="{28A0092B-C50C-407E-A947-70E740481C1C}">
+                <a14:useLocalDpi xmlns:a14="http://schemas.microsoft.com/office/drawing/2010/main" val="0"/>
+              </a:ext>
+            </a:extLst>
+          </a:blip>
+          <a:srcRect t="4780"/>
+          <a:stretch>
+            <a:fillRect/>
+          </a:stretch>
+        </p:blipFill>
+        <p:spPr>
+          <a:xfrm>
+            <a:off x="88265" y="886252"/>
+            <a:ext cx="11664950" cy="5547908"/>
+          </a:xfrm>
+          <a:prstGeom prst="rect">
+            <a:avLst/>
+          </a:prstGeom>
+        </p:spPr>
+      </p:pic>
+    </p:spTree>
+    <p:extLst>
+      <p:ext uri="{BB962C8B-B14F-4D97-AF65-F5344CB8AC3E}">
+        <p14:creationId xmlns:p14="http://schemas.microsoft.com/office/powerpoint/2010/main" val="1194386226"/>
+      </p:ext>
+    </p:extLst>
+  </p:cSld>
+  <p:clrMapOvr>
+    <a:masterClrMapping/>
+  </p:clrMapOvr>
+</p:sld>
+</file>
+
+<file path=ppt/slides/slide14.xml><?xml version="1.0" encoding="utf-8"?>
+<p:sld xmlns:a="http://schemas.openxmlformats.org/drawingml/2006/main" xmlns:r="http://schemas.openxmlformats.org/officeDocument/2006/relationships" xmlns:p="http://schemas.openxmlformats.org/presentationml/2006/main">
+  <p:cSld>
+    <p:spTree>
+      <p:nvGrpSpPr>
+        <p:cNvPr id="1" name=""/>
+        <p:cNvGrpSpPr/>
+        <p:nvPr/>
+      </p:nvGrpSpPr>
+      <p:grpSpPr>
+        <a:xfrm>
+          <a:off x="0" y="0"/>
+          <a:ext cx="0" cy="0"/>
+          <a:chOff x="0" y="0"/>
+          <a:chExt cx="0" cy="0"/>
+        </a:xfrm>
+      </p:grpSpPr>
+      <p:sp>
+        <p:nvSpPr>
           <p:cNvPr id="2" name="Title 1">
             <a:extLst>
               <a:ext uri="{FF2B5EF4-FFF2-40B4-BE49-F238E27FC236}">
@@ -11253,13 +11732,7 @@
   <p:cSld>
     <p:spTree>
       <p:nvGrpSpPr>
-        <p:cNvPr id="1" name="">
-          <a:extLst>
-            <a:ext uri="{FF2B5EF4-FFF2-40B4-BE49-F238E27FC236}">
-              <a16:creationId xmlns:a16="http://schemas.microsoft.com/office/drawing/2014/main" id="{1F630A85-8C66-988D-E25C-0C5D1C1014C9}"/>
-            </a:ext>
-          </a:extLst>
-        </p:cNvPr>
+        <p:cNvPr id="1" name=""/>
         <p:cNvGrpSpPr/>
         <p:nvPr/>
       </p:nvGrpSpPr>
@@ -11273,10 +11746,10 @@
       </p:grpSpPr>
       <p:sp>
         <p:nvSpPr>
-          <p:cNvPr id="10" name="Titolo 1">
-            <a:extLst>
-              <a:ext uri="{FF2B5EF4-FFF2-40B4-BE49-F238E27FC236}">
-                <a16:creationId xmlns:a16="http://schemas.microsoft.com/office/drawing/2014/main" id="{351995F4-C6D7-B83A-6ECA-DDDFA79AD6C9}"/>
+          <p:cNvPr id="2" name="Titolo 1">
+            <a:extLst>
+              <a:ext uri="{FF2B5EF4-FFF2-40B4-BE49-F238E27FC236}">
+                <a16:creationId xmlns:a16="http://schemas.microsoft.com/office/drawing/2014/main" id="{E8674132-80AA-8487-B9AC-533018E17BD3}"/>
               </a:ext>
             </a:extLst>
           </p:cNvPr>
@@ -11287,112 +11760,47 @@
             <p:ph type="title"/>
           </p:nvPr>
         </p:nvSpPr>
-        <p:spPr>
-          <a:xfrm>
-            <a:off x="266400" y="180000"/>
-            <a:ext cx="11664950" cy="1080000"/>
-          </a:xfrm>
-        </p:spPr>
+        <p:spPr/>
         <p:txBody>
           <a:bodyPr/>
           <a:lstStyle/>
           <a:p>
             <a:r>
               <a:rPr lang="it-IT" dirty="0"/>
-              <a:t>SOP ATE = 4 - 1 kHz</a:t>
-            </a:r>
-          </a:p>
-        </p:txBody>
-      </p:sp>
-      <p:sp>
-        <p:nvSpPr>
-          <p:cNvPr id="8" name="CasellaDiTesto 7">
-            <a:extLst>
-              <a:ext uri="{FF2B5EF4-FFF2-40B4-BE49-F238E27FC236}">
-                <a16:creationId xmlns:a16="http://schemas.microsoft.com/office/drawing/2014/main" id="{EF2FAF30-5D79-073C-E9E1-140C05643B4F}"/>
-              </a:ext>
-            </a:extLst>
-          </p:cNvPr>
-          <p:cNvSpPr txBox="1"/>
-          <p:nvPr/>
-        </p:nvSpPr>
-        <p:spPr>
-          <a:xfrm>
-            <a:off x="5920740" y="6434160"/>
-            <a:ext cx="541020" cy="369332"/>
-          </a:xfrm>
-          <a:prstGeom prst="rect">
-            <a:avLst/>
-          </a:prstGeom>
-          <a:noFill/>
-        </p:spPr>
-        <p:txBody>
-          <a:bodyPr wrap="square" rtlCol="0">
-            <a:spAutoFit/>
-          </a:bodyPr>
-          <a:lstStyle/>
-          <a:p>
-            <a:r>
-              <a:rPr lang="en-GB" dirty="0">
-                <a:solidFill>
-                  <a:schemeClr val="bg1"/>
-                </a:solidFill>
-              </a:rPr>
-              <a:t>12</a:t>
-            </a:r>
-          </a:p>
-        </p:txBody>
-      </p:sp>
-      <p:pic>
-        <p:nvPicPr>
-          <p:cNvPr id="4" name="Immagine 3">
-            <a:extLst>
-              <a:ext uri="{FF2B5EF4-FFF2-40B4-BE49-F238E27FC236}">
-                <a16:creationId xmlns:a16="http://schemas.microsoft.com/office/drawing/2014/main" id="{30F82671-95A2-0728-4C8D-BFF13A41C640}"/>
-              </a:ext>
-            </a:extLst>
-          </p:cNvPr>
-          <p:cNvPicPr>
-            <a:picLocks noChangeAspect="1"/>
-          </p:cNvPicPr>
-          <p:nvPr/>
-        </p:nvPicPr>
-        <p:blipFill>
-          <a:blip r:embed="rId2">
-            <a:clrChange>
-              <a:clrFrom>
-                <a:srgbClr val="FFFFFF"/>
-              </a:clrFrom>
-              <a:clrTo>
-                <a:srgbClr val="FFFFFF">
-                  <a:alpha val="0"/>
-                </a:srgbClr>
-              </a:clrTo>
-            </a:clrChange>
-            <a:extLst>
-              <a:ext uri="{28A0092B-C50C-407E-A947-70E740481C1C}">
-                <a14:useLocalDpi xmlns:a14="http://schemas.microsoft.com/office/drawing/2010/main" val="0"/>
-              </a:ext>
-            </a:extLst>
-          </a:blip>
-          <a:stretch>
-            <a:fillRect/>
-          </a:stretch>
-        </p:blipFill>
-        <p:spPr>
-          <a:xfrm>
-            <a:off x="359312" y="651182"/>
-            <a:ext cx="11122855" cy="5555635"/>
-          </a:xfrm>
-          <a:prstGeom prst="rect">
-            <a:avLst/>
-          </a:prstGeom>
-        </p:spPr>
-      </p:pic>
+              <a:t>Modalità di acquisizione</a:t>
+            </a:r>
+          </a:p>
+        </p:txBody>
+      </p:sp>
+      <p:sp>
+        <p:nvSpPr>
+          <p:cNvPr id="3" name="Segnaposto contenuto 2">
+            <a:extLst>
+              <a:ext uri="{FF2B5EF4-FFF2-40B4-BE49-F238E27FC236}">
+                <a16:creationId xmlns:a16="http://schemas.microsoft.com/office/drawing/2014/main" id="{182F4DFF-A167-B2B9-5747-17FFC9D5C7CB}"/>
+              </a:ext>
+            </a:extLst>
+          </p:cNvPr>
+          <p:cNvSpPr>
+            <a:spLocks noGrp="1"/>
+          </p:cNvSpPr>
+          <p:nvPr>
+            <p:ph idx="1"/>
+          </p:nvPr>
+        </p:nvSpPr>
+        <p:spPr/>
+        <p:txBody>
+          <a:bodyPr/>
+          <a:lstStyle/>
+          <a:p>
+            <a:endParaRPr lang="it-IT"/>
+          </a:p>
+        </p:txBody>
+      </p:sp>
     </p:spTree>
     <p:extLst>
       <p:ext uri="{BB962C8B-B14F-4D97-AF65-F5344CB8AC3E}">
-        <p14:creationId xmlns:p14="http://schemas.microsoft.com/office/powerpoint/2010/main" val="2649181556"/>
+        <p14:creationId xmlns:p14="http://schemas.microsoft.com/office/powerpoint/2010/main" val="3278819013"/>
       </p:ext>
     </p:extLst>
   </p:cSld>
@@ -11407,13 +11815,7 @@
   <p:cSld>
     <p:spTree>
       <p:nvGrpSpPr>
-        <p:cNvPr id="1" name="">
-          <a:extLst>
-            <a:ext uri="{FF2B5EF4-FFF2-40B4-BE49-F238E27FC236}">
-              <a16:creationId xmlns:a16="http://schemas.microsoft.com/office/drawing/2014/main" id="{5F6FCE80-537A-40E3-B804-31B95159052B}"/>
-            </a:ext>
-          </a:extLst>
-        </p:cNvPr>
+        <p:cNvPr id="1" name=""/>
         <p:cNvGrpSpPr/>
         <p:nvPr/>
       </p:nvGrpSpPr>
@@ -11427,10 +11829,10 @@
       </p:grpSpPr>
       <p:sp>
         <p:nvSpPr>
-          <p:cNvPr id="10" name="Titolo 1">
-            <a:extLst>
-              <a:ext uri="{FF2B5EF4-FFF2-40B4-BE49-F238E27FC236}">
-                <a16:creationId xmlns:a16="http://schemas.microsoft.com/office/drawing/2014/main" id="{316D60DC-CB63-6020-36F6-D12B004F5EAE}"/>
+          <p:cNvPr id="2" name="Titolo 1">
+            <a:extLst>
+              <a:ext uri="{FF2B5EF4-FFF2-40B4-BE49-F238E27FC236}">
+                <a16:creationId xmlns:a16="http://schemas.microsoft.com/office/drawing/2014/main" id="{359E9160-13C6-48C9-38FD-DAFC023CD621}"/>
               </a:ext>
             </a:extLst>
           </p:cNvPr>
@@ -11441,113 +11843,47 @@
             <p:ph type="title"/>
           </p:nvPr>
         </p:nvSpPr>
-        <p:spPr>
-          <a:xfrm>
-            <a:off x="266400" y="180000"/>
-            <a:ext cx="11664950" cy="1080000"/>
-          </a:xfrm>
-        </p:spPr>
+        <p:spPr/>
         <p:txBody>
           <a:bodyPr/>
           <a:lstStyle/>
           <a:p>
             <a:r>
               <a:rPr lang="it-IT" dirty="0"/>
-              <a:t>SOP ATE = 4 - 100 Hz</a:t>
-            </a:r>
-          </a:p>
-        </p:txBody>
-      </p:sp>
-      <p:sp>
-        <p:nvSpPr>
-          <p:cNvPr id="8" name="CasellaDiTesto 7">
-            <a:extLst>
-              <a:ext uri="{FF2B5EF4-FFF2-40B4-BE49-F238E27FC236}">
-                <a16:creationId xmlns:a16="http://schemas.microsoft.com/office/drawing/2014/main" id="{100BD6A8-1345-B730-AE3F-17A142CF8F79}"/>
-              </a:ext>
-            </a:extLst>
-          </p:cNvPr>
-          <p:cNvSpPr txBox="1"/>
-          <p:nvPr/>
-        </p:nvSpPr>
-        <p:spPr>
-          <a:xfrm>
-            <a:off x="5920740" y="6434160"/>
-            <a:ext cx="541020" cy="369332"/>
-          </a:xfrm>
-          <a:prstGeom prst="rect">
-            <a:avLst/>
-          </a:prstGeom>
-          <a:noFill/>
-        </p:spPr>
-        <p:txBody>
-          <a:bodyPr wrap="square" rtlCol="0">
-            <a:spAutoFit/>
-          </a:bodyPr>
-          <a:lstStyle/>
-          <a:p>
-            <a:r>
-              <a:rPr lang="en-GB" dirty="0">
-                <a:solidFill>
-                  <a:schemeClr val="bg1"/>
-                </a:solidFill>
-              </a:rPr>
-              <a:t>12</a:t>
-            </a:r>
-          </a:p>
-        </p:txBody>
-      </p:sp>
-      <p:pic>
-        <p:nvPicPr>
-          <p:cNvPr id="3" name="Immagine 2">
-            <a:extLst>
-              <a:ext uri="{FF2B5EF4-FFF2-40B4-BE49-F238E27FC236}">
-                <a16:creationId xmlns:a16="http://schemas.microsoft.com/office/drawing/2014/main" id="{40EEA688-24E2-9230-B82E-E8E0EE58B316}"/>
-              </a:ext>
-            </a:extLst>
-          </p:cNvPr>
-          <p:cNvPicPr>
-            <a:picLocks noChangeAspect="1"/>
-          </p:cNvPicPr>
-          <p:nvPr/>
-        </p:nvPicPr>
-        <p:blipFill>
-          <a:blip r:embed="rId2">
-            <a:clrChange>
-              <a:clrFrom>
-                <a:srgbClr val="FFFFFF"/>
-              </a:clrFrom>
-              <a:clrTo>
-                <a:srgbClr val="FFFFFF">
-                  <a:alpha val="0"/>
-                </a:srgbClr>
-              </a:clrTo>
-            </a:clrChange>
-            <a:extLst>
-              <a:ext uri="{28A0092B-C50C-407E-A947-70E740481C1C}">
-                <a14:useLocalDpi xmlns:a14="http://schemas.microsoft.com/office/drawing/2010/main" val="0"/>
-              </a:ext>
-            </a:extLst>
-          </a:blip>
-          <a:srcRect t="4780"/>
-          <a:stretch>
-            <a:fillRect/>
-          </a:stretch>
-        </p:blipFill>
-        <p:spPr>
-          <a:xfrm>
-            <a:off x="88265" y="886252"/>
-            <a:ext cx="11664950" cy="5547908"/>
-          </a:xfrm>
-          <a:prstGeom prst="rect">
-            <a:avLst/>
-          </a:prstGeom>
-        </p:spPr>
-      </p:pic>
+              <a:t>Sincronizzazione FPGA-PM1000</a:t>
+            </a:r>
+          </a:p>
+        </p:txBody>
+      </p:sp>
+      <p:sp>
+        <p:nvSpPr>
+          <p:cNvPr id="3" name="Segnaposto contenuto 2">
+            <a:extLst>
+              <a:ext uri="{FF2B5EF4-FFF2-40B4-BE49-F238E27FC236}">
+                <a16:creationId xmlns:a16="http://schemas.microsoft.com/office/drawing/2014/main" id="{D06EE895-2CA5-BAEE-9C86-A3193C0DE709}"/>
+              </a:ext>
+            </a:extLst>
+          </p:cNvPr>
+          <p:cNvSpPr>
+            <a:spLocks noGrp="1"/>
+          </p:cNvSpPr>
+          <p:nvPr>
+            <p:ph idx="1"/>
+          </p:nvPr>
+        </p:nvSpPr>
+        <p:spPr/>
+        <p:txBody>
+          <a:bodyPr/>
+          <a:lstStyle/>
+          <a:p>
+            <a:endParaRPr lang="it-IT"/>
+          </a:p>
+        </p:txBody>
+      </p:sp>
     </p:spTree>
     <p:extLst>
       <p:ext uri="{BB962C8B-B14F-4D97-AF65-F5344CB8AC3E}">
-        <p14:creationId xmlns:p14="http://schemas.microsoft.com/office/powerpoint/2010/main" val="1194386226"/>
+        <p14:creationId xmlns:p14="http://schemas.microsoft.com/office/powerpoint/2010/main" val="1009496160"/>
       </p:ext>
     </p:extLst>
   </p:cSld>
@@ -11574,49 +11910,12 @@
           <a:chExt cx="0" cy="0"/>
         </a:xfrm>
       </p:grpSpPr>
-      <p:pic>
-        <p:nvPicPr>
-          <p:cNvPr id="6" name="Immagine 5">
-            <a:extLst>
-              <a:ext uri="{FF2B5EF4-FFF2-40B4-BE49-F238E27FC236}">
-                <a16:creationId xmlns:a16="http://schemas.microsoft.com/office/drawing/2014/main" id="{647AC981-8FC9-12DC-FE0E-FA269B095F4F}"/>
-              </a:ext>
-            </a:extLst>
-          </p:cNvPr>
-          <p:cNvPicPr>
-            <a:picLocks noChangeAspect="1"/>
-          </p:cNvPicPr>
-          <p:nvPr/>
-        </p:nvPicPr>
-        <p:blipFill>
-          <a:blip r:embed="rId2">
-            <a:extLst>
-              <a:ext uri="{28A0092B-C50C-407E-A947-70E740481C1C}">
-                <a14:useLocalDpi xmlns:a14="http://schemas.microsoft.com/office/drawing/2010/main" val="0"/>
-              </a:ext>
-            </a:extLst>
-          </a:blip>
-          <a:srcRect l="2720"/>
-          <a:stretch>
-            <a:fillRect/>
-          </a:stretch>
-        </p:blipFill>
-        <p:spPr>
-          <a:xfrm>
-            <a:off x="805475" y="1196281"/>
-            <a:ext cx="10581050" cy="4668188"/>
-          </a:xfrm>
-          <a:prstGeom prst="rect">
-            <a:avLst/>
-          </a:prstGeom>
-        </p:spPr>
-      </p:pic>
-      <p:sp>
-        <p:nvSpPr>
-          <p:cNvPr id="4" name="Titolo 1">
-            <a:extLst>
-              <a:ext uri="{FF2B5EF4-FFF2-40B4-BE49-F238E27FC236}">
-                <a16:creationId xmlns:a16="http://schemas.microsoft.com/office/drawing/2014/main" id="{00BF9DF0-03D3-0DDC-B153-3E3D21E89B24}"/>
+      <p:sp>
+        <p:nvSpPr>
+          <p:cNvPr id="2" name="Titolo 1">
+            <a:extLst>
+              <a:ext uri="{FF2B5EF4-FFF2-40B4-BE49-F238E27FC236}">
+                <a16:creationId xmlns:a16="http://schemas.microsoft.com/office/drawing/2014/main" id="{BD9A8F3E-8C98-B128-B40B-053421F25415}"/>
               </a:ext>
             </a:extLst>
           </p:cNvPr>
@@ -11627,71 +11926,47 @@
             <p:ph type="title"/>
           </p:nvPr>
         </p:nvSpPr>
-        <p:spPr>
-          <a:xfrm>
-            <a:off x="0" y="249727"/>
-            <a:ext cx="11661775" cy="606425"/>
-          </a:xfrm>
-        </p:spPr>
+        <p:spPr/>
         <p:txBody>
           <a:bodyPr/>
           <a:lstStyle/>
           <a:p>
             <a:r>
               <a:rPr lang="it-IT" dirty="0"/>
-              <a:t>Misure di fase FPGA – STM32 su fibra urbana </a:t>
-            </a:r>
-            <a:r>
-              <a:rPr lang="it-IT" dirty="0" err="1"/>
-              <a:t>INRiM</a:t>
-            </a:r>
-            <a:endParaRPr lang="it-IT" dirty="0"/>
-          </a:p>
-        </p:txBody>
-      </p:sp>
-      <p:sp>
-        <p:nvSpPr>
-          <p:cNvPr id="2" name="CasellaDiTesto 1">
-            <a:extLst>
-              <a:ext uri="{FF2B5EF4-FFF2-40B4-BE49-F238E27FC236}">
-                <a16:creationId xmlns:a16="http://schemas.microsoft.com/office/drawing/2014/main" id="{17E5E999-9757-E691-7B50-82ADDC88A082}"/>
-              </a:ext>
-            </a:extLst>
-          </p:cNvPr>
-          <p:cNvSpPr txBox="1"/>
-          <p:nvPr/>
-        </p:nvSpPr>
-        <p:spPr>
-          <a:xfrm>
-            <a:off x="5920740" y="6434160"/>
-            <a:ext cx="350520" cy="369332"/>
-          </a:xfrm>
-          <a:prstGeom prst="rect">
-            <a:avLst/>
-          </a:prstGeom>
-          <a:noFill/>
-        </p:spPr>
-        <p:txBody>
-          <a:bodyPr wrap="square" rtlCol="0">
-            <a:spAutoFit/>
-          </a:bodyPr>
-          <a:lstStyle/>
-          <a:p>
-            <a:r>
-              <a:rPr lang="en-GB" dirty="0">
-                <a:solidFill>
-                  <a:schemeClr val="bg1"/>
-                </a:solidFill>
-              </a:rPr>
-              <a:t>8</a:t>
-            </a:r>
+              <a:t>PSD SOP con diversi livelli di Pin</a:t>
+            </a:r>
+          </a:p>
+        </p:txBody>
+      </p:sp>
+      <p:sp>
+        <p:nvSpPr>
+          <p:cNvPr id="3" name="Segnaposto contenuto 2">
+            <a:extLst>
+              <a:ext uri="{FF2B5EF4-FFF2-40B4-BE49-F238E27FC236}">
+                <a16:creationId xmlns:a16="http://schemas.microsoft.com/office/drawing/2014/main" id="{EC9CA506-91AB-EA7F-5507-C15F52F9F8DC}"/>
+              </a:ext>
+            </a:extLst>
+          </p:cNvPr>
+          <p:cNvSpPr>
+            <a:spLocks noGrp="1"/>
+          </p:cNvSpPr>
+          <p:nvPr>
+            <p:ph idx="1"/>
+          </p:nvPr>
+        </p:nvSpPr>
+        <p:spPr/>
+        <p:txBody>
+          <a:bodyPr/>
+          <a:lstStyle/>
+          <a:p>
+            <a:endParaRPr lang="it-IT"/>
           </a:p>
         </p:txBody>
       </p:sp>
     </p:spTree>
     <p:extLst>
       <p:ext uri="{BB962C8B-B14F-4D97-AF65-F5344CB8AC3E}">
-        <p14:creationId xmlns:p14="http://schemas.microsoft.com/office/powerpoint/2010/main" val="4120565418"/>
+        <p14:creationId xmlns:p14="http://schemas.microsoft.com/office/powerpoint/2010/main" val="2061641021"/>
       </p:ext>
     </p:extLst>
   </p:cSld>
@@ -11723,7 +11998,7 @@
           <p:cNvPr id="2" name="Titolo 1">
             <a:extLst>
               <a:ext uri="{FF2B5EF4-FFF2-40B4-BE49-F238E27FC236}">
-                <a16:creationId xmlns:a16="http://schemas.microsoft.com/office/drawing/2014/main" id="{6B1F2CD7-C054-4178-C821-FD11F38DE8D8}"/>
+                <a16:creationId xmlns:a16="http://schemas.microsoft.com/office/drawing/2014/main" id="{450B4821-3306-2825-F659-BCD540293CBF}"/>
               </a:ext>
             </a:extLst>
           </p:cNvPr>
@@ -11741,96 +12016,40 @@
           <a:p>
             <a:r>
               <a:rPr lang="it-IT" dirty="0"/>
-              <a:t>Misure di fase FPGA – STM32 su fibra urbana </a:t>
-            </a:r>
-            <a:r>
-              <a:rPr lang="it-IT" dirty="0" err="1"/>
-              <a:t>INRiM</a:t>
-            </a:r>
-            <a:endParaRPr lang="it-IT" dirty="0"/>
-          </a:p>
-        </p:txBody>
-      </p:sp>
-      <p:sp>
-        <p:nvSpPr>
-          <p:cNvPr id="5" name="CasellaDiTesto 4">
-            <a:extLst>
-              <a:ext uri="{FF2B5EF4-FFF2-40B4-BE49-F238E27FC236}">
-                <a16:creationId xmlns:a16="http://schemas.microsoft.com/office/drawing/2014/main" id="{ABBF30F4-7C2A-7DB2-95D6-0885FA5D6C19}"/>
-              </a:ext>
-            </a:extLst>
-          </p:cNvPr>
-          <p:cNvSpPr txBox="1"/>
-          <p:nvPr/>
-        </p:nvSpPr>
-        <p:spPr>
-          <a:xfrm>
-            <a:off x="5920740" y="6434160"/>
-            <a:ext cx="723900" cy="369332"/>
-          </a:xfrm>
-          <a:prstGeom prst="rect">
-            <a:avLst/>
-          </a:prstGeom>
-          <a:noFill/>
-        </p:spPr>
-        <p:txBody>
-          <a:bodyPr wrap="square" rtlCol="0">
-            <a:spAutoFit/>
-          </a:bodyPr>
-          <a:lstStyle/>
-          <a:p>
-            <a:r>
-              <a:rPr lang="en-GB" dirty="0">
-                <a:solidFill>
-                  <a:schemeClr val="bg1"/>
-                </a:solidFill>
-              </a:rPr>
-              <a:t>14</a:t>
-            </a:r>
-          </a:p>
-        </p:txBody>
-      </p:sp>
-      <p:pic>
-        <p:nvPicPr>
-          <p:cNvPr id="6" name="Immagine 5">
-            <a:extLst>
-              <a:ext uri="{FF2B5EF4-FFF2-40B4-BE49-F238E27FC236}">
-                <a16:creationId xmlns:a16="http://schemas.microsoft.com/office/drawing/2014/main" id="{E5F14973-B645-5CB4-9135-3FF42CFBEEFB}"/>
-              </a:ext>
-            </a:extLst>
-          </p:cNvPr>
-          <p:cNvPicPr>
-            <a:picLocks noChangeAspect="1"/>
-          </p:cNvPicPr>
-          <p:nvPr/>
-        </p:nvPicPr>
-        <p:blipFill>
-          <a:blip r:embed="rId2">
-            <a:extLst>
-              <a:ext uri="{28A0092B-C50C-407E-A947-70E740481C1C}">
-                <a14:useLocalDpi xmlns:a14="http://schemas.microsoft.com/office/drawing/2010/main" val="0"/>
-              </a:ext>
-            </a:extLst>
-          </a:blip>
-          <a:srcRect l="5792" t="8346" r="7316" b="4298"/>
-          <a:stretch>
-            <a:fillRect/>
-          </a:stretch>
-        </p:blipFill>
-        <p:spPr>
-          <a:xfrm>
-            <a:off x="1301261" y="896814"/>
-            <a:ext cx="9363809" cy="5240217"/>
-          </a:xfrm>
-          <a:prstGeom prst="rect">
-            <a:avLst/>
-          </a:prstGeom>
-        </p:spPr>
-      </p:pic>
+              <a:t>PSD SOP diversi valori di ATE</a:t>
+            </a:r>
+          </a:p>
+        </p:txBody>
+      </p:sp>
+      <p:sp>
+        <p:nvSpPr>
+          <p:cNvPr id="3" name="Segnaposto contenuto 2">
+            <a:extLst>
+              <a:ext uri="{FF2B5EF4-FFF2-40B4-BE49-F238E27FC236}">
+                <a16:creationId xmlns:a16="http://schemas.microsoft.com/office/drawing/2014/main" id="{8A523D95-9A85-051C-4B65-64C702150715}"/>
+              </a:ext>
+            </a:extLst>
+          </p:cNvPr>
+          <p:cNvSpPr>
+            <a:spLocks noGrp="1"/>
+          </p:cNvSpPr>
+          <p:nvPr>
+            <p:ph idx="1"/>
+          </p:nvPr>
+        </p:nvSpPr>
+        <p:spPr/>
+        <p:txBody>
+          <a:bodyPr/>
+          <a:lstStyle/>
+          <a:p>
+            <a:endParaRPr lang="it-IT"/>
+          </a:p>
+        </p:txBody>
+      </p:sp>
     </p:spTree>
     <p:extLst>
       <p:ext uri="{BB962C8B-B14F-4D97-AF65-F5344CB8AC3E}">
-        <p14:creationId xmlns:p14="http://schemas.microsoft.com/office/powerpoint/2010/main" val="2354069701"/>
+        <p14:creationId xmlns:p14="http://schemas.microsoft.com/office/powerpoint/2010/main" val="3775798004"/>
       </p:ext>
     </p:extLst>
   </p:cSld>
@@ -11845,13 +12064,7 @@
   <p:cSld>
     <p:spTree>
       <p:nvGrpSpPr>
-        <p:cNvPr id="1" name="">
-          <a:extLst>
-            <a:ext uri="{FF2B5EF4-FFF2-40B4-BE49-F238E27FC236}">
-              <a16:creationId xmlns:a16="http://schemas.microsoft.com/office/drawing/2014/main" id="{EFC9421F-36CE-9E41-BD55-CABDD87B2528}"/>
-            </a:ext>
-          </a:extLst>
-        </p:cNvPr>
+        <p:cNvPr id="1" name=""/>
         <p:cNvGrpSpPr/>
         <p:nvPr/>
       </p:nvGrpSpPr>
@@ -11865,10 +12078,10 @@
       </p:grpSpPr>
       <p:sp>
         <p:nvSpPr>
-          <p:cNvPr id="10" name="Titolo 1">
-            <a:extLst>
-              <a:ext uri="{FF2B5EF4-FFF2-40B4-BE49-F238E27FC236}">
-                <a16:creationId xmlns:a16="http://schemas.microsoft.com/office/drawing/2014/main" id="{4F5A25F8-CA57-D29B-066B-A0E6DE7C5742}"/>
+          <p:cNvPr id="2" name="Titolo 1">
+            <a:extLst>
+              <a:ext uri="{FF2B5EF4-FFF2-40B4-BE49-F238E27FC236}">
+                <a16:creationId xmlns:a16="http://schemas.microsoft.com/office/drawing/2014/main" id="{7E8CC921-DB12-AE60-A7DE-3F2F69DF05D1}"/>
               </a:ext>
             </a:extLst>
           </p:cNvPr>
@@ -11879,189 +12092,47 @@
             <p:ph type="title"/>
           </p:nvPr>
         </p:nvSpPr>
-        <p:spPr>
-          <a:xfrm>
-            <a:off x="266400" y="180000"/>
-            <a:ext cx="11664950" cy="1080000"/>
-          </a:xfrm>
-        </p:spPr>
+        <p:spPr/>
         <p:txBody>
           <a:bodyPr/>
           <a:lstStyle/>
           <a:p>
             <a:r>
               <a:rPr lang="it-IT" dirty="0"/>
-              <a:t>Misure di fase FPGA – STM32 su fibra urbana </a:t>
-            </a:r>
-            <a:r>
-              <a:rPr lang="it-IT" dirty="0" err="1"/>
-              <a:t>INRiM</a:t>
-            </a:r>
-            <a:endParaRPr lang="it-IT" dirty="0"/>
-          </a:p>
-        </p:txBody>
-      </p:sp>
-      <p:sp>
-        <p:nvSpPr>
-          <p:cNvPr id="5" name="CasellaDiTesto 4">
-            <a:extLst>
-              <a:ext uri="{FF2B5EF4-FFF2-40B4-BE49-F238E27FC236}">
-                <a16:creationId xmlns:a16="http://schemas.microsoft.com/office/drawing/2014/main" id="{4D630410-D347-7DF1-19FE-799764A352E3}"/>
-              </a:ext>
-            </a:extLst>
-          </p:cNvPr>
-          <p:cNvSpPr txBox="1"/>
-          <p:nvPr/>
-        </p:nvSpPr>
-        <p:spPr>
-          <a:xfrm>
-            <a:off x="5920740" y="6434160"/>
-            <a:ext cx="459740" cy="369332"/>
-          </a:xfrm>
-          <a:prstGeom prst="rect">
-            <a:avLst/>
-          </a:prstGeom>
-          <a:noFill/>
-        </p:spPr>
-        <p:txBody>
-          <a:bodyPr wrap="square" rtlCol="0">
-            <a:spAutoFit/>
-          </a:bodyPr>
-          <a:lstStyle/>
-          <a:p>
-            <a:r>
-              <a:rPr lang="en-GB" dirty="0">
-                <a:solidFill>
-                  <a:schemeClr val="bg1"/>
-                </a:solidFill>
-              </a:rPr>
-              <a:t>13</a:t>
-            </a:r>
-          </a:p>
-        </p:txBody>
-      </p:sp>
-      <p:pic>
-        <p:nvPicPr>
-          <p:cNvPr id="2" name="Segnaposto contenuto 4">
-            <a:extLst>
-              <a:ext uri="{FF2B5EF4-FFF2-40B4-BE49-F238E27FC236}">
-                <a16:creationId xmlns:a16="http://schemas.microsoft.com/office/drawing/2014/main" id="{7AF3A277-D13E-BB3E-788A-C4A7ED416C35}"/>
-              </a:ext>
-            </a:extLst>
-          </p:cNvPr>
-          <p:cNvPicPr>
-            <a:picLocks noGrp="1" noChangeAspect="1"/>
-          </p:cNvPicPr>
+              <a:t>Quantizzazione</a:t>
+            </a:r>
+          </a:p>
+        </p:txBody>
+      </p:sp>
+      <p:sp>
+        <p:nvSpPr>
+          <p:cNvPr id="3" name="Segnaposto contenuto 2">
+            <a:extLst>
+              <a:ext uri="{FF2B5EF4-FFF2-40B4-BE49-F238E27FC236}">
+                <a16:creationId xmlns:a16="http://schemas.microsoft.com/office/drawing/2014/main" id="{31DA2A48-4642-43C5-A219-D69143989F14}"/>
+              </a:ext>
+            </a:extLst>
+          </p:cNvPr>
+          <p:cNvSpPr>
+            <a:spLocks noGrp="1"/>
+          </p:cNvSpPr>
           <p:nvPr>
             <p:ph idx="1"/>
           </p:nvPr>
-        </p:nvPicPr>
-        <p:blipFill>
-          <a:blip r:embed="rId2">
-            <a:extLst>
-              <a:ext uri="{28A0092B-C50C-407E-A947-70E740481C1C}">
-                <a14:useLocalDpi xmlns:a14="http://schemas.microsoft.com/office/drawing/2010/main" val="0"/>
-              </a:ext>
-            </a:extLst>
-          </a:blip>
-          <a:srcRect l="3082" b="2765"/>
-          <a:stretch>
-            <a:fillRect/>
-          </a:stretch>
-        </p:blipFill>
-        <p:spPr>
-          <a:xfrm>
-            <a:off x="1630503" y="931785"/>
-            <a:ext cx="8930994" cy="4994430"/>
-          </a:xfrm>
-          <a:prstGeom prst="rect">
-            <a:avLst/>
-          </a:prstGeom>
-        </p:spPr>
-      </p:pic>
-      <p:sp>
-        <p:nvSpPr>
-          <p:cNvPr id="3" name="CasellaDiTesto 2">
-            <a:extLst>
-              <a:ext uri="{FF2B5EF4-FFF2-40B4-BE49-F238E27FC236}">
-                <a16:creationId xmlns:a16="http://schemas.microsoft.com/office/drawing/2014/main" id="{7A86DC78-A514-9BE0-8A59-6A68F506E5F9}"/>
-              </a:ext>
-            </a:extLst>
-          </p:cNvPr>
-          <p:cNvSpPr txBox="1"/>
-          <p:nvPr/>
-        </p:nvSpPr>
-        <p:spPr>
-          <a:xfrm>
-            <a:off x="266401" y="5926215"/>
-            <a:ext cx="11603214" cy="338554"/>
-          </a:xfrm>
-          <a:prstGeom prst="rect">
-            <a:avLst/>
-          </a:prstGeom>
-          <a:noFill/>
-        </p:spPr>
-        <p:txBody>
-          <a:bodyPr wrap="square" rtlCol="0">
-            <a:spAutoFit/>
-          </a:bodyPr>
-          <a:lstStyle/>
-          <a:p>
-            <a:pPr algn="ctr"/>
-            <a:r>
-              <a:rPr lang="it-IT" sz="1600" dirty="0"/>
-              <a:t>Reference: </a:t>
-            </a:r>
-            <a:r>
-              <a:rPr lang="it-IT" sz="1600" dirty="0">
-                <a:hlinkClick r:id="rId3" action="ppaction://hlinkfile"/>
-              </a:rPr>
-              <a:t>Donadello et al. - 2023 - Embedded Digital </a:t>
-            </a:r>
-            <a:r>
-              <a:rPr lang="it-IT" sz="1600" dirty="0" err="1">
-                <a:hlinkClick r:id="rId3" action="ppaction://hlinkfile"/>
-              </a:rPr>
-              <a:t>Phase</a:t>
-            </a:r>
-            <a:r>
-              <a:rPr lang="it-IT" sz="1600" dirty="0">
-                <a:hlinkClick r:id="rId3" action="ppaction://hlinkfile"/>
-              </a:rPr>
-              <a:t> </a:t>
-            </a:r>
-            <a:r>
-              <a:rPr lang="it-IT" sz="1600" dirty="0" err="1">
-                <a:hlinkClick r:id="rId3" action="ppaction://hlinkfile"/>
-              </a:rPr>
-              <a:t>Noise</a:t>
-            </a:r>
-            <a:r>
-              <a:rPr lang="it-IT" sz="1600" dirty="0">
-                <a:hlinkClick r:id="rId3" action="ppaction://hlinkfile"/>
-              </a:rPr>
-              <a:t> Analyzer for Optical Frequency </a:t>
-            </a:r>
-            <a:r>
-              <a:rPr lang="it-IT" sz="1600" dirty="0" err="1">
-                <a:hlinkClick r:id="rId3" action="ppaction://hlinkfile"/>
-              </a:rPr>
-              <a:t>Metrology</a:t>
-            </a:r>
-            <a:r>
-              <a:rPr lang="it-IT" sz="1600" dirty="0">
-                <a:hlinkClick r:id="rId3" action="ppaction://hlinkfile"/>
-              </a:rPr>
-              <a:t> </a:t>
-            </a:r>
-            <a:endParaRPr lang="it-IT" sz="1600" dirty="0"/>
+        </p:nvSpPr>
+        <p:spPr/>
+        <p:txBody>
+          <a:bodyPr/>
+          <a:lstStyle/>
+          <a:p>
+            <a:endParaRPr lang="it-IT"/>
           </a:p>
         </p:txBody>
       </p:sp>
     </p:spTree>
     <p:extLst>
       <p:ext uri="{BB962C8B-B14F-4D97-AF65-F5344CB8AC3E}">
-        <p14:creationId xmlns:p14="http://schemas.microsoft.com/office/powerpoint/2010/main" val="4223474480"/>
+        <p14:creationId xmlns:p14="http://schemas.microsoft.com/office/powerpoint/2010/main" val="1377187253"/>
       </p:ext>
     </p:extLst>
   </p:cSld>
@@ -12093,7 +12164,7 @@
           <p:cNvPr id="2" name="Titolo 1">
             <a:extLst>
               <a:ext uri="{FF2B5EF4-FFF2-40B4-BE49-F238E27FC236}">
-                <a16:creationId xmlns:a16="http://schemas.microsoft.com/office/drawing/2014/main" id="{B0DB0904-3B4C-6923-3F41-3A1B8BB72CA2}"/>
+                <a16:creationId xmlns:a16="http://schemas.microsoft.com/office/drawing/2014/main" id="{C8FA1AE1-1A93-602E-1373-D9707F71D0C4}"/>
               </a:ext>
             </a:extLst>
           </p:cNvPr>
@@ -12111,90 +12182,40 @@
           <a:p>
             <a:r>
               <a:rPr lang="it-IT" dirty="0"/>
-              <a:t>FFT sullo zoom con residui</a:t>
-            </a:r>
-          </a:p>
-        </p:txBody>
-      </p:sp>
-      <p:sp>
-        <p:nvSpPr>
-          <p:cNvPr id="3" name="CasellaDiTesto 2">
-            <a:extLst>
-              <a:ext uri="{FF2B5EF4-FFF2-40B4-BE49-F238E27FC236}">
-                <a16:creationId xmlns:a16="http://schemas.microsoft.com/office/drawing/2014/main" id="{6ACB3521-4D40-92CD-E521-7A72547A94A4}"/>
-              </a:ext>
-            </a:extLst>
-          </p:cNvPr>
-          <p:cNvSpPr txBox="1"/>
-          <p:nvPr/>
-        </p:nvSpPr>
-        <p:spPr>
-          <a:xfrm>
-            <a:off x="5920740" y="6434160"/>
-            <a:ext cx="350520" cy="369332"/>
-          </a:xfrm>
-          <a:prstGeom prst="rect">
-            <a:avLst/>
-          </a:prstGeom>
-          <a:noFill/>
-        </p:spPr>
-        <p:txBody>
-          <a:bodyPr wrap="square" rtlCol="0">
-            <a:spAutoFit/>
-          </a:bodyPr>
-          <a:lstStyle/>
-          <a:p>
-            <a:r>
-              <a:rPr lang="en-GB" dirty="0">
-                <a:solidFill>
-                  <a:schemeClr val="bg1"/>
-                </a:solidFill>
-              </a:rPr>
-              <a:t>8</a:t>
-            </a:r>
-          </a:p>
-        </p:txBody>
-      </p:sp>
-      <p:pic>
-        <p:nvPicPr>
-          <p:cNvPr id="10" name="Immagine 9">
-            <a:extLst>
-              <a:ext uri="{FF2B5EF4-FFF2-40B4-BE49-F238E27FC236}">
-                <a16:creationId xmlns:a16="http://schemas.microsoft.com/office/drawing/2014/main" id="{F33FE863-53ED-8D84-9A52-7323AE31EA3F}"/>
-              </a:ext>
-            </a:extLst>
-          </p:cNvPr>
-          <p:cNvPicPr>
-            <a:picLocks noChangeAspect="1"/>
-          </p:cNvPicPr>
-          <p:nvPr/>
-        </p:nvPicPr>
-        <p:blipFill>
-          <a:blip r:embed="rId2">
-            <a:extLst>
-              <a:ext uri="{28A0092B-C50C-407E-A947-70E740481C1C}">
-                <a14:useLocalDpi xmlns:a14="http://schemas.microsoft.com/office/drawing/2010/main" val="0"/>
-              </a:ext>
-            </a:extLst>
-          </a:blip>
-          <a:stretch>
-            <a:fillRect/>
-          </a:stretch>
-        </p:blipFill>
-        <p:spPr>
-          <a:xfrm>
-            <a:off x="1574987" y="1064974"/>
-            <a:ext cx="9042026" cy="5033159"/>
-          </a:xfrm>
-          <a:prstGeom prst="rect">
-            <a:avLst/>
-          </a:prstGeom>
-        </p:spPr>
-      </p:pic>
+              <a:t>Rete urbana</a:t>
+            </a:r>
+          </a:p>
+        </p:txBody>
+      </p:sp>
+      <p:sp>
+        <p:nvSpPr>
+          <p:cNvPr id="3" name="Segnaposto contenuto 2">
+            <a:extLst>
+              <a:ext uri="{FF2B5EF4-FFF2-40B4-BE49-F238E27FC236}">
+                <a16:creationId xmlns:a16="http://schemas.microsoft.com/office/drawing/2014/main" id="{0BB186A3-6FE6-8728-1FDA-73E2A9B3D21D}"/>
+              </a:ext>
+            </a:extLst>
+          </p:cNvPr>
+          <p:cNvSpPr>
+            <a:spLocks noGrp="1"/>
+          </p:cNvSpPr>
+          <p:nvPr>
+            <p:ph idx="1"/>
+          </p:nvPr>
+        </p:nvSpPr>
+        <p:spPr/>
+        <p:txBody>
+          <a:bodyPr/>
+          <a:lstStyle/>
+          <a:p>
+            <a:endParaRPr lang="it-IT"/>
+          </a:p>
+        </p:txBody>
+      </p:sp>
     </p:spTree>
     <p:extLst>
       <p:ext uri="{BB962C8B-B14F-4D97-AF65-F5344CB8AC3E}">
-        <p14:creationId xmlns:p14="http://schemas.microsoft.com/office/powerpoint/2010/main" val="2971382839"/>
+        <p14:creationId xmlns:p14="http://schemas.microsoft.com/office/powerpoint/2010/main" val="950741520"/>
       </p:ext>
     </p:extLst>
   </p:cSld>
@@ -13411,6 +13432,15 @@
 </file>
 
 <file path=customXml/item1.xml><?xml version="1.0" encoding="utf-8"?>
+<?mso-contentType ?>
+<FormTemplates xmlns="http://schemas.microsoft.com/sharepoint/v3/contenttype/forms">
+  <Display>DocumentLibraryForm</Display>
+  <Edit>DocumentLibraryForm</Edit>
+  <New>DocumentLibraryForm</New>
+</FormTemplates>
+</file>
+
+<file path=customXml/item2.xml><?xml version="1.0" encoding="utf-8"?>
 <ct:contentTypeSchema xmlns:ct="http://schemas.microsoft.com/office/2006/metadata/contentType" xmlns:ma="http://schemas.microsoft.com/office/2006/metadata/properties/metaAttributes" ct:_="" ma:_="" ma:contentTypeName="Document" ma:contentTypeID="0x0101004855725CFF937040894F497962944123" ma:contentTypeVersion="12" ma:contentTypeDescription="Create a new document." ma:contentTypeScope="" ma:versionID="7a0e623862b5493cb3745d6796d6e55f">
   <xsd:schema xmlns:xsd="http://www.w3.org/2001/XMLSchema" xmlns:xs="http://www.w3.org/2001/XMLSchema" xmlns:p="http://schemas.microsoft.com/office/2006/metadata/properties" xmlns:ns3="e1991b7f-6b7d-449b-b767-f5f786c869d3" targetNamespace="http://schemas.microsoft.com/office/2006/metadata/properties" ma:root="true" ma:fieldsID="6c1c622ae9065d5d3394d8a852b1f736" ns3:_="">
     <xsd:import namespace="e1991b7f-6b7d-449b-b767-f5f786c869d3"/>
@@ -13604,15 +13634,6 @@
 </ct:contentTypeSchema>
 </file>
 
-<file path=customXml/item2.xml><?xml version="1.0" encoding="utf-8"?>
-<?mso-contentType ?>
-<FormTemplates xmlns="http://schemas.microsoft.com/sharepoint/v3/contenttype/forms">
-  <Display>DocumentLibraryForm</Display>
-  <Edit>DocumentLibraryForm</Edit>
-  <New>DocumentLibraryForm</New>
-</FormTemplates>
-</file>
-
 <file path=customXml/item3.xml><?xml version="1.0" encoding="utf-8"?>
 <p:properties xmlns:p="http://schemas.microsoft.com/office/2006/metadata/properties" xmlns:xsi="http://www.w3.org/2001/XMLSchema-instance" xmlns:pc="http://schemas.microsoft.com/office/infopath/2007/PartnerControls">
   <documentManagement>
@@ -13622,6 +13643,14 @@
 </file>
 
 <file path=customXml/itemProps1.xml><?xml version="1.0" encoding="utf-8"?>
+<ds:datastoreItem xmlns:ds="http://schemas.openxmlformats.org/officeDocument/2006/customXml" ds:itemID="{C49F161D-94DE-4FB8-B032-342C52D425B3}">
+  <ds:schemaRefs>
+    <ds:schemaRef ds:uri="http://schemas.microsoft.com/sharepoint/v3/contenttype/forms"/>
+  </ds:schemaRefs>
+</ds:datastoreItem>
+</file>
+
+<file path=customXml/itemProps2.xml><?xml version="1.0" encoding="utf-8"?>
 <ds:datastoreItem xmlns:ds="http://schemas.openxmlformats.org/officeDocument/2006/customXml" ds:itemID="{FEA029C0-35CF-4CF5-BA61-F48A3501E860}">
   <ds:schemaRefs>
     <ds:schemaRef ds:uri="http://schemas.microsoft.com/office/2006/metadata/contentType"/>
@@ -13639,26 +13668,18 @@
 </ds:datastoreItem>
 </file>
 
-<file path=customXml/itemProps2.xml><?xml version="1.0" encoding="utf-8"?>
-<ds:datastoreItem xmlns:ds="http://schemas.openxmlformats.org/officeDocument/2006/customXml" ds:itemID="{C49F161D-94DE-4FB8-B032-342C52D425B3}">
-  <ds:schemaRefs>
-    <ds:schemaRef ds:uri="http://schemas.microsoft.com/sharepoint/v3/contenttype/forms"/>
-  </ds:schemaRefs>
-</ds:datastoreItem>
-</file>
-
 <file path=customXml/itemProps3.xml><?xml version="1.0" encoding="utf-8"?>
 <ds:datastoreItem xmlns:ds="http://schemas.openxmlformats.org/officeDocument/2006/customXml" ds:itemID="{2CABA873-0994-4738-95F5-BEAE2390D7EB}">
   <ds:schemaRefs>
+    <ds:schemaRef ds:uri="http://schemas.microsoft.com/office/2006/documentManagement/types"/>
+    <ds:schemaRef ds:uri="http://purl.org/dc/elements/1.1/"/>
     <ds:schemaRef ds:uri="http://schemas.microsoft.com/office/2006/metadata/properties"/>
-    <ds:schemaRef ds:uri="http://schemas.microsoft.com/office/2006/documentManagement/types"/>
+    <ds:schemaRef ds:uri="http://purl.org/dc/terms/"/>
+    <ds:schemaRef ds:uri="http://schemas.openxmlformats.org/package/2006/metadata/core-properties"/>
+    <ds:schemaRef ds:uri="http://www.w3.org/XML/1998/namespace"/>
     <ds:schemaRef ds:uri="http://schemas.microsoft.com/office/infopath/2007/PartnerControls"/>
+    <ds:schemaRef ds:uri="e1991b7f-6b7d-449b-b767-f5f786c869d3"/>
     <ds:schemaRef ds:uri="http://purl.org/dc/dcmitype/"/>
-    <ds:schemaRef ds:uri="http://schemas.openxmlformats.org/package/2006/metadata/core-properties"/>
-    <ds:schemaRef ds:uri="http://purl.org/dc/elements/1.1/"/>
-    <ds:schemaRef ds:uri="e1991b7f-6b7d-449b-b767-f5f786c869d3"/>
-    <ds:schemaRef ds:uri="http://www.w3.org/XML/1998/namespace"/>
-    <ds:schemaRef ds:uri="http://purl.org/dc/terms/"/>
   </ds:schemaRefs>
 </ds:datastoreItem>
 </file>
--- a/Presentazione_07_09.pptx
+++ b/Presentazione_07_09.pptx
@@ -7,19 +7,21 @@
     <p:sldMasterId id="2147483682" r:id="rId6"/>
   </p:sldMasterIdLst>
   <p:notesMasterIdLst>
-    <p:notesMasterId r:id="rId17"/>
+    <p:notesMasterId r:id="rId19"/>
   </p:notesMasterIdLst>
   <p:sldIdLst>
     <p:sldId id="257" r:id="rId7"/>
     <p:sldId id="325" r:id="rId8"/>
     <p:sldId id="312" r:id="rId9"/>
-    <p:sldId id="322" r:id="rId10"/>
-    <p:sldId id="329" r:id="rId11"/>
-    <p:sldId id="328" r:id="rId12"/>
-    <p:sldId id="316" r:id="rId13"/>
-    <p:sldId id="324" r:id="rId14"/>
-    <p:sldId id="327" r:id="rId15"/>
-    <p:sldId id="298" r:id="rId16"/>
+    <p:sldId id="330" r:id="rId10"/>
+    <p:sldId id="331" r:id="rId11"/>
+    <p:sldId id="332" r:id="rId12"/>
+    <p:sldId id="333" r:id="rId13"/>
+    <p:sldId id="334" r:id="rId14"/>
+    <p:sldId id="335" r:id="rId15"/>
+    <p:sldId id="336" r:id="rId16"/>
+    <p:sldId id="337" r:id="rId17"/>
+    <p:sldId id="298" r:id="rId18"/>
   </p:sldIdLst>
   <p:sldSz cx="12192000" cy="6858000"/>
   <p:notesSz cx="6858000" cy="9144000"/>
@@ -241,7 +243,7 @@
           <a:p>
             <a:fld id="{71531CDF-70D6-4AEF-91E2-1A078360BAF5}" type="datetimeFigureOut">
               <a:rPr lang="it-IT" smtClean="0"/>
-              <a:t>28/08/2026</a:t>
+              <a:t>02/09/2026</a:t>
             </a:fld>
             <a:endParaRPr lang="it-IT"/>
           </a:p>
@@ -3523,7 +3525,7 @@
           <a:p>
             <a:fld id="{0AAAF750-697A-42EE-BA8B-A382A30B9D4A}" type="datetimeFigureOut">
               <a:rPr lang="en-GB" smtClean="0"/>
-              <a:t>28/08/2026</a:t>
+              <a:t>02/09/2026</a:t>
             </a:fld>
             <a:endParaRPr lang="en-GB"/>
           </a:p>
@@ -3723,7 +3725,7 @@
           <a:p>
             <a:fld id="{0AAAF750-697A-42EE-BA8B-A382A30B9D4A}" type="datetimeFigureOut">
               <a:rPr lang="en-GB" smtClean="0"/>
-              <a:t>28/08/2026</a:t>
+              <a:t>02/09/2026</a:t>
             </a:fld>
             <a:endParaRPr lang="en-GB"/>
           </a:p>
@@ -3999,7 +4001,7 @@
           <a:p>
             <a:fld id="{0AAAF750-697A-42EE-BA8B-A382A30B9D4A}" type="datetimeFigureOut">
               <a:rPr lang="en-GB" smtClean="0"/>
-              <a:t>28/08/2026</a:t>
+              <a:t>02/09/2026</a:t>
             </a:fld>
             <a:endParaRPr lang="en-GB"/>
           </a:p>
@@ -4267,7 +4269,7 @@
           <a:p>
             <a:fld id="{0AAAF750-697A-42EE-BA8B-A382A30B9D4A}" type="datetimeFigureOut">
               <a:rPr lang="en-GB" smtClean="0"/>
-              <a:t>28/08/2026</a:t>
+              <a:t>02/09/2026</a:t>
             </a:fld>
             <a:endParaRPr lang="en-GB"/>
           </a:p>
@@ -4682,7 +4684,7 @@
           <a:p>
             <a:fld id="{0AAAF750-697A-42EE-BA8B-A382A30B9D4A}" type="datetimeFigureOut">
               <a:rPr lang="en-GB" smtClean="0"/>
-              <a:t>28/08/2026</a:t>
+              <a:t>02/09/2026</a:t>
             </a:fld>
             <a:endParaRPr lang="en-GB"/>
           </a:p>
@@ -4824,7 +4826,7 @@
           <a:p>
             <a:fld id="{0AAAF750-697A-42EE-BA8B-A382A30B9D4A}" type="datetimeFigureOut">
               <a:rPr lang="en-GB" smtClean="0"/>
-              <a:t>28/08/2026</a:t>
+              <a:t>02/09/2026</a:t>
             </a:fld>
             <a:endParaRPr lang="en-GB"/>
           </a:p>
@@ -4937,7 +4939,7 @@
           <a:p>
             <a:fld id="{0AAAF750-697A-42EE-BA8B-A382A30B9D4A}" type="datetimeFigureOut">
               <a:rPr lang="en-GB" smtClean="0"/>
-              <a:t>28/08/2026</a:t>
+              <a:t>02/09/2026</a:t>
             </a:fld>
             <a:endParaRPr lang="en-GB"/>
           </a:p>
@@ -5250,7 +5252,7 @@
           <a:p>
             <a:fld id="{0AAAF750-697A-42EE-BA8B-A382A30B9D4A}" type="datetimeFigureOut">
               <a:rPr lang="en-GB" smtClean="0"/>
-              <a:t>28/08/2026</a:t>
+              <a:t>02/09/2026</a:t>
             </a:fld>
             <a:endParaRPr lang="en-GB"/>
           </a:p>
@@ -5539,7 +5541,7 @@
           <a:p>
             <a:fld id="{0AAAF750-697A-42EE-BA8B-A382A30B9D4A}" type="datetimeFigureOut">
               <a:rPr lang="en-GB" smtClean="0"/>
-              <a:t>28/08/2026</a:t>
+              <a:t>02/09/2026</a:t>
             </a:fld>
             <a:endParaRPr lang="en-GB"/>
           </a:p>
@@ -5739,7 +5741,7 @@
           <a:p>
             <a:fld id="{0AAAF750-697A-42EE-BA8B-A382A30B9D4A}" type="datetimeFigureOut">
               <a:rPr lang="en-GB" smtClean="0"/>
-              <a:t>28/08/2026</a:t>
+              <a:t>02/09/2026</a:t>
             </a:fld>
             <a:endParaRPr lang="en-GB"/>
           </a:p>
@@ -6278,7 +6280,7 @@
           <a:p>
             <a:fld id="{0AAAF750-697A-42EE-BA8B-A382A30B9D4A}" type="datetimeFigureOut">
               <a:rPr lang="en-GB" smtClean="0"/>
-              <a:t>28/08/2026</a:t>
+              <a:t>02/09/2026</a:t>
             </a:fld>
             <a:endParaRPr lang="en-GB"/>
           </a:p>
@@ -8321,7 +8323,7 @@
           <a:p>
             <a:fld id="{0AAAF750-697A-42EE-BA8B-A382A30B9D4A}" type="datetimeFigureOut">
               <a:rPr lang="en-GB" smtClean="0"/>
-              <a:t>28/08/2026</a:t>
+              <a:t>02/09/2026</a:t>
             </a:fld>
             <a:endParaRPr lang="en-GB"/>
           </a:p>
@@ -9621,6 +9623,172 @@
       </p:grpSpPr>
       <p:sp>
         <p:nvSpPr>
+          <p:cNvPr id="2" name="Titolo 1">
+            <a:extLst>
+              <a:ext uri="{FF2B5EF4-FFF2-40B4-BE49-F238E27FC236}">
+                <a16:creationId xmlns:a16="http://schemas.microsoft.com/office/drawing/2014/main" id="{2937A81E-F205-E586-B44C-211579A5C77D}"/>
+              </a:ext>
+            </a:extLst>
+          </p:cNvPr>
+          <p:cNvSpPr>
+            <a:spLocks noGrp="1"/>
+          </p:cNvSpPr>
+          <p:nvPr>
+            <p:ph type="title"/>
+          </p:nvPr>
+        </p:nvSpPr>
+        <p:spPr/>
+        <p:txBody>
+          <a:bodyPr/>
+          <a:lstStyle/>
+          <a:p>
+            <a:r>
+              <a:rPr lang="it-IT" dirty="0"/>
+              <a:t>Sensing lavori 4 piano</a:t>
+            </a:r>
+          </a:p>
+        </p:txBody>
+      </p:sp>
+      <p:sp>
+        <p:nvSpPr>
+          <p:cNvPr id="3" name="Segnaposto contenuto 2">
+            <a:extLst>
+              <a:ext uri="{FF2B5EF4-FFF2-40B4-BE49-F238E27FC236}">
+                <a16:creationId xmlns:a16="http://schemas.microsoft.com/office/drawing/2014/main" id="{4FAAB8A8-4C6E-857D-F91B-D496DE51D63C}"/>
+              </a:ext>
+            </a:extLst>
+          </p:cNvPr>
+          <p:cNvSpPr>
+            <a:spLocks noGrp="1"/>
+          </p:cNvSpPr>
+          <p:nvPr>
+            <p:ph idx="1"/>
+          </p:nvPr>
+        </p:nvSpPr>
+        <p:spPr/>
+        <p:txBody>
+          <a:bodyPr/>
+          <a:lstStyle/>
+          <a:p>
+            <a:endParaRPr lang="it-IT"/>
+          </a:p>
+        </p:txBody>
+      </p:sp>
+    </p:spTree>
+    <p:extLst>
+      <p:ext uri="{BB962C8B-B14F-4D97-AF65-F5344CB8AC3E}">
+        <p14:creationId xmlns:p14="http://schemas.microsoft.com/office/powerpoint/2010/main" val="2635465820"/>
+      </p:ext>
+    </p:extLst>
+  </p:cSld>
+  <p:clrMapOvr>
+    <a:masterClrMapping/>
+  </p:clrMapOvr>
+</p:sld>
+</file>
+
+<file path=ppt/slides/slide11.xml><?xml version="1.0" encoding="utf-8"?>
+<p:sld xmlns:a="http://schemas.openxmlformats.org/drawingml/2006/main" xmlns:r="http://schemas.openxmlformats.org/officeDocument/2006/relationships" xmlns:p="http://schemas.openxmlformats.org/presentationml/2006/main">
+  <p:cSld>
+    <p:spTree>
+      <p:nvGrpSpPr>
+        <p:cNvPr id="1" name=""/>
+        <p:cNvGrpSpPr/>
+        <p:nvPr/>
+      </p:nvGrpSpPr>
+      <p:grpSpPr>
+        <a:xfrm>
+          <a:off x="0" y="0"/>
+          <a:ext cx="0" cy="0"/>
+          <a:chOff x="0" y="0"/>
+          <a:chExt cx="0" cy="0"/>
+        </a:xfrm>
+      </p:grpSpPr>
+      <p:sp>
+        <p:nvSpPr>
+          <p:cNvPr id="2" name="Titolo 1">
+            <a:extLst>
+              <a:ext uri="{FF2B5EF4-FFF2-40B4-BE49-F238E27FC236}">
+                <a16:creationId xmlns:a16="http://schemas.microsoft.com/office/drawing/2014/main" id="{B194CA4F-9647-0712-D4E2-721054D2C9DE}"/>
+              </a:ext>
+            </a:extLst>
+          </p:cNvPr>
+          <p:cNvSpPr>
+            <a:spLocks noGrp="1"/>
+          </p:cNvSpPr>
+          <p:nvPr>
+            <p:ph type="title"/>
+          </p:nvPr>
+        </p:nvSpPr>
+        <p:spPr/>
+        <p:txBody>
+          <a:bodyPr/>
+          <a:lstStyle/>
+          <a:p>
+            <a:r>
+              <a:rPr lang="it-IT" dirty="0"/>
+              <a:t>terremoto</a:t>
+            </a:r>
+          </a:p>
+        </p:txBody>
+      </p:sp>
+      <p:sp>
+        <p:nvSpPr>
+          <p:cNvPr id="3" name="Segnaposto contenuto 2">
+            <a:extLst>
+              <a:ext uri="{FF2B5EF4-FFF2-40B4-BE49-F238E27FC236}">
+                <a16:creationId xmlns:a16="http://schemas.microsoft.com/office/drawing/2014/main" id="{AC2384BA-1A9F-CCCA-CB2F-B050E00EC90C}"/>
+              </a:ext>
+            </a:extLst>
+          </p:cNvPr>
+          <p:cNvSpPr>
+            <a:spLocks noGrp="1"/>
+          </p:cNvSpPr>
+          <p:nvPr>
+            <p:ph idx="1"/>
+          </p:nvPr>
+        </p:nvSpPr>
+        <p:spPr/>
+        <p:txBody>
+          <a:bodyPr/>
+          <a:lstStyle/>
+          <a:p>
+            <a:endParaRPr lang="it-IT"/>
+          </a:p>
+        </p:txBody>
+      </p:sp>
+    </p:spTree>
+    <p:extLst>
+      <p:ext uri="{BB962C8B-B14F-4D97-AF65-F5344CB8AC3E}">
+        <p14:creationId xmlns:p14="http://schemas.microsoft.com/office/powerpoint/2010/main" val="577277101"/>
+      </p:ext>
+    </p:extLst>
+  </p:cSld>
+  <p:clrMapOvr>
+    <a:masterClrMapping/>
+  </p:clrMapOvr>
+</p:sld>
+</file>
+
+<file path=ppt/slides/slide12.xml><?xml version="1.0" encoding="utf-8"?>
+<p:sld xmlns:a="http://schemas.openxmlformats.org/drawingml/2006/main" xmlns:r="http://schemas.openxmlformats.org/officeDocument/2006/relationships" xmlns:p="http://schemas.openxmlformats.org/presentationml/2006/main">
+  <p:cSld>
+    <p:spTree>
+      <p:nvGrpSpPr>
+        <p:cNvPr id="1" name=""/>
+        <p:cNvGrpSpPr/>
+        <p:nvPr/>
+      </p:nvGrpSpPr>
+      <p:grpSpPr>
+        <a:xfrm>
+          <a:off x="0" y="0"/>
+          <a:ext cx="0" cy="0"/>
+          <a:chOff x="0" y="0"/>
+          <a:chExt cx="0" cy="0"/>
+        </a:xfrm>
+      </p:grpSpPr>
+      <p:sp>
+        <p:nvSpPr>
           <p:cNvPr id="2" name="Title 1">
             <a:extLst>
               <a:ext uri="{FF2B5EF4-FFF2-40B4-BE49-F238E27FC236}">
@@ -11253,13 +11421,7 @@
   <p:cSld>
     <p:spTree>
       <p:nvGrpSpPr>
-        <p:cNvPr id="1" name="">
-          <a:extLst>
-            <a:ext uri="{FF2B5EF4-FFF2-40B4-BE49-F238E27FC236}">
-              <a16:creationId xmlns:a16="http://schemas.microsoft.com/office/drawing/2014/main" id="{1F630A85-8C66-988D-E25C-0C5D1C1014C9}"/>
-            </a:ext>
-          </a:extLst>
-        </p:cNvPr>
+        <p:cNvPr id="1" name=""/>
         <p:cNvGrpSpPr/>
         <p:nvPr/>
       </p:nvGrpSpPr>
@@ -11273,10 +11435,10 @@
       </p:grpSpPr>
       <p:sp>
         <p:nvSpPr>
-          <p:cNvPr id="10" name="Titolo 1">
-            <a:extLst>
-              <a:ext uri="{FF2B5EF4-FFF2-40B4-BE49-F238E27FC236}">
-                <a16:creationId xmlns:a16="http://schemas.microsoft.com/office/drawing/2014/main" id="{351995F4-C6D7-B83A-6ECA-DDDFA79AD6C9}"/>
+          <p:cNvPr id="2" name="Titolo 1">
+            <a:extLst>
+              <a:ext uri="{FF2B5EF4-FFF2-40B4-BE49-F238E27FC236}">
+                <a16:creationId xmlns:a16="http://schemas.microsoft.com/office/drawing/2014/main" id="{E8674132-80AA-8487-B9AC-533018E17BD3}"/>
               </a:ext>
             </a:extLst>
           </p:cNvPr>
@@ -11287,112 +11449,47 @@
             <p:ph type="title"/>
           </p:nvPr>
         </p:nvSpPr>
-        <p:spPr>
-          <a:xfrm>
-            <a:off x="266400" y="180000"/>
-            <a:ext cx="11664950" cy="1080000"/>
-          </a:xfrm>
-        </p:spPr>
+        <p:spPr/>
         <p:txBody>
           <a:bodyPr/>
           <a:lstStyle/>
           <a:p>
             <a:r>
               <a:rPr lang="it-IT" dirty="0"/>
-              <a:t>SOP ATE = 4 - 1 kHz</a:t>
-            </a:r>
-          </a:p>
-        </p:txBody>
-      </p:sp>
-      <p:sp>
-        <p:nvSpPr>
-          <p:cNvPr id="8" name="CasellaDiTesto 7">
-            <a:extLst>
-              <a:ext uri="{FF2B5EF4-FFF2-40B4-BE49-F238E27FC236}">
-                <a16:creationId xmlns:a16="http://schemas.microsoft.com/office/drawing/2014/main" id="{EF2FAF30-5D79-073C-E9E1-140C05643B4F}"/>
-              </a:ext>
-            </a:extLst>
-          </p:cNvPr>
-          <p:cNvSpPr txBox="1"/>
-          <p:nvPr/>
-        </p:nvSpPr>
-        <p:spPr>
-          <a:xfrm>
-            <a:off x="5920740" y="6434160"/>
-            <a:ext cx="541020" cy="369332"/>
-          </a:xfrm>
-          <a:prstGeom prst="rect">
-            <a:avLst/>
-          </a:prstGeom>
-          <a:noFill/>
-        </p:spPr>
-        <p:txBody>
-          <a:bodyPr wrap="square" rtlCol="0">
-            <a:spAutoFit/>
-          </a:bodyPr>
-          <a:lstStyle/>
-          <a:p>
-            <a:r>
-              <a:rPr lang="en-GB" dirty="0">
-                <a:solidFill>
-                  <a:schemeClr val="bg1"/>
-                </a:solidFill>
-              </a:rPr>
-              <a:t>12</a:t>
-            </a:r>
-          </a:p>
-        </p:txBody>
-      </p:sp>
-      <p:pic>
-        <p:nvPicPr>
-          <p:cNvPr id="4" name="Immagine 3">
-            <a:extLst>
-              <a:ext uri="{FF2B5EF4-FFF2-40B4-BE49-F238E27FC236}">
-                <a16:creationId xmlns:a16="http://schemas.microsoft.com/office/drawing/2014/main" id="{30F82671-95A2-0728-4C8D-BFF13A41C640}"/>
-              </a:ext>
-            </a:extLst>
-          </p:cNvPr>
-          <p:cNvPicPr>
-            <a:picLocks noChangeAspect="1"/>
-          </p:cNvPicPr>
-          <p:nvPr/>
-        </p:nvPicPr>
-        <p:blipFill>
-          <a:blip r:embed="rId2">
-            <a:clrChange>
-              <a:clrFrom>
-                <a:srgbClr val="FFFFFF"/>
-              </a:clrFrom>
-              <a:clrTo>
-                <a:srgbClr val="FFFFFF">
-                  <a:alpha val="0"/>
-                </a:srgbClr>
-              </a:clrTo>
-            </a:clrChange>
-            <a:extLst>
-              <a:ext uri="{28A0092B-C50C-407E-A947-70E740481C1C}">
-                <a14:useLocalDpi xmlns:a14="http://schemas.microsoft.com/office/drawing/2010/main" val="0"/>
-              </a:ext>
-            </a:extLst>
-          </a:blip>
-          <a:stretch>
-            <a:fillRect/>
-          </a:stretch>
-        </p:blipFill>
-        <p:spPr>
-          <a:xfrm>
-            <a:off x="359312" y="651182"/>
-            <a:ext cx="11122855" cy="5555635"/>
-          </a:xfrm>
-          <a:prstGeom prst="rect">
-            <a:avLst/>
-          </a:prstGeom>
-        </p:spPr>
-      </p:pic>
+              <a:t>Modalità di acquisizione</a:t>
+            </a:r>
+          </a:p>
+        </p:txBody>
+      </p:sp>
+      <p:sp>
+        <p:nvSpPr>
+          <p:cNvPr id="3" name="Segnaposto contenuto 2">
+            <a:extLst>
+              <a:ext uri="{FF2B5EF4-FFF2-40B4-BE49-F238E27FC236}">
+                <a16:creationId xmlns:a16="http://schemas.microsoft.com/office/drawing/2014/main" id="{182F4DFF-A167-B2B9-5747-17FFC9D5C7CB}"/>
+              </a:ext>
+            </a:extLst>
+          </p:cNvPr>
+          <p:cNvSpPr>
+            <a:spLocks noGrp="1"/>
+          </p:cNvSpPr>
+          <p:nvPr>
+            <p:ph idx="1"/>
+          </p:nvPr>
+        </p:nvSpPr>
+        <p:spPr/>
+        <p:txBody>
+          <a:bodyPr/>
+          <a:lstStyle/>
+          <a:p>
+            <a:endParaRPr lang="it-IT" dirty="0"/>
+          </a:p>
+        </p:txBody>
+      </p:sp>
     </p:spTree>
     <p:extLst>
       <p:ext uri="{BB962C8B-B14F-4D97-AF65-F5344CB8AC3E}">
-        <p14:creationId xmlns:p14="http://schemas.microsoft.com/office/powerpoint/2010/main" val="2649181556"/>
+        <p14:creationId xmlns:p14="http://schemas.microsoft.com/office/powerpoint/2010/main" val="3278819013"/>
       </p:ext>
     </p:extLst>
   </p:cSld>
@@ -11407,13 +11504,7 @@
   <p:cSld>
     <p:spTree>
       <p:nvGrpSpPr>
-        <p:cNvPr id="1" name="">
-          <a:extLst>
-            <a:ext uri="{FF2B5EF4-FFF2-40B4-BE49-F238E27FC236}">
-              <a16:creationId xmlns:a16="http://schemas.microsoft.com/office/drawing/2014/main" id="{5F6FCE80-537A-40E3-B804-31B95159052B}"/>
-            </a:ext>
-          </a:extLst>
-        </p:cNvPr>
+        <p:cNvPr id="1" name=""/>
         <p:cNvGrpSpPr/>
         <p:nvPr/>
       </p:nvGrpSpPr>
@@ -11427,10 +11518,10 @@
       </p:grpSpPr>
       <p:sp>
         <p:nvSpPr>
-          <p:cNvPr id="10" name="Titolo 1">
-            <a:extLst>
-              <a:ext uri="{FF2B5EF4-FFF2-40B4-BE49-F238E27FC236}">
-                <a16:creationId xmlns:a16="http://schemas.microsoft.com/office/drawing/2014/main" id="{316D60DC-CB63-6020-36F6-D12B004F5EAE}"/>
+          <p:cNvPr id="2" name="Titolo 1">
+            <a:extLst>
+              <a:ext uri="{FF2B5EF4-FFF2-40B4-BE49-F238E27FC236}">
+                <a16:creationId xmlns:a16="http://schemas.microsoft.com/office/drawing/2014/main" id="{359E9160-13C6-48C9-38FD-DAFC023CD621}"/>
               </a:ext>
             </a:extLst>
           </p:cNvPr>
@@ -11441,113 +11532,47 @@
             <p:ph type="title"/>
           </p:nvPr>
         </p:nvSpPr>
-        <p:spPr>
-          <a:xfrm>
-            <a:off x="266400" y="180000"/>
-            <a:ext cx="11664950" cy="1080000"/>
-          </a:xfrm>
-        </p:spPr>
+        <p:spPr/>
         <p:txBody>
           <a:bodyPr/>
           <a:lstStyle/>
           <a:p>
             <a:r>
               <a:rPr lang="it-IT" dirty="0"/>
-              <a:t>SOP ATE = 4 - 100 Hz</a:t>
-            </a:r>
-          </a:p>
-        </p:txBody>
-      </p:sp>
-      <p:sp>
-        <p:nvSpPr>
-          <p:cNvPr id="8" name="CasellaDiTesto 7">
-            <a:extLst>
-              <a:ext uri="{FF2B5EF4-FFF2-40B4-BE49-F238E27FC236}">
-                <a16:creationId xmlns:a16="http://schemas.microsoft.com/office/drawing/2014/main" id="{100BD6A8-1345-B730-AE3F-17A142CF8F79}"/>
-              </a:ext>
-            </a:extLst>
-          </p:cNvPr>
-          <p:cNvSpPr txBox="1"/>
-          <p:nvPr/>
-        </p:nvSpPr>
-        <p:spPr>
-          <a:xfrm>
-            <a:off x="5920740" y="6434160"/>
-            <a:ext cx="541020" cy="369332"/>
-          </a:xfrm>
-          <a:prstGeom prst="rect">
-            <a:avLst/>
-          </a:prstGeom>
-          <a:noFill/>
-        </p:spPr>
-        <p:txBody>
-          <a:bodyPr wrap="square" rtlCol="0">
-            <a:spAutoFit/>
-          </a:bodyPr>
-          <a:lstStyle/>
-          <a:p>
-            <a:r>
-              <a:rPr lang="en-GB" dirty="0">
-                <a:solidFill>
-                  <a:schemeClr val="bg1"/>
-                </a:solidFill>
-              </a:rPr>
-              <a:t>12</a:t>
-            </a:r>
-          </a:p>
-        </p:txBody>
-      </p:sp>
-      <p:pic>
-        <p:nvPicPr>
-          <p:cNvPr id="3" name="Immagine 2">
-            <a:extLst>
-              <a:ext uri="{FF2B5EF4-FFF2-40B4-BE49-F238E27FC236}">
-                <a16:creationId xmlns:a16="http://schemas.microsoft.com/office/drawing/2014/main" id="{40EEA688-24E2-9230-B82E-E8E0EE58B316}"/>
-              </a:ext>
-            </a:extLst>
-          </p:cNvPr>
-          <p:cNvPicPr>
-            <a:picLocks noChangeAspect="1"/>
-          </p:cNvPicPr>
-          <p:nvPr/>
-        </p:nvPicPr>
-        <p:blipFill>
-          <a:blip r:embed="rId2">
-            <a:clrChange>
-              <a:clrFrom>
-                <a:srgbClr val="FFFFFF"/>
-              </a:clrFrom>
-              <a:clrTo>
-                <a:srgbClr val="FFFFFF">
-                  <a:alpha val="0"/>
-                </a:srgbClr>
-              </a:clrTo>
-            </a:clrChange>
-            <a:extLst>
-              <a:ext uri="{28A0092B-C50C-407E-A947-70E740481C1C}">
-                <a14:useLocalDpi xmlns:a14="http://schemas.microsoft.com/office/drawing/2010/main" val="0"/>
-              </a:ext>
-            </a:extLst>
-          </a:blip>
-          <a:srcRect t="4780"/>
-          <a:stretch>
-            <a:fillRect/>
-          </a:stretch>
-        </p:blipFill>
-        <p:spPr>
-          <a:xfrm>
-            <a:off x="88265" y="886252"/>
-            <a:ext cx="11664950" cy="5547908"/>
-          </a:xfrm>
-          <a:prstGeom prst="rect">
-            <a:avLst/>
-          </a:prstGeom>
-        </p:spPr>
-      </p:pic>
+              <a:t>Sincronizzazione FPGA-PM1000</a:t>
+            </a:r>
+          </a:p>
+        </p:txBody>
+      </p:sp>
+      <p:sp>
+        <p:nvSpPr>
+          <p:cNvPr id="3" name="Segnaposto contenuto 2">
+            <a:extLst>
+              <a:ext uri="{FF2B5EF4-FFF2-40B4-BE49-F238E27FC236}">
+                <a16:creationId xmlns:a16="http://schemas.microsoft.com/office/drawing/2014/main" id="{D06EE895-2CA5-BAEE-9C86-A3193C0DE709}"/>
+              </a:ext>
+            </a:extLst>
+          </p:cNvPr>
+          <p:cNvSpPr>
+            <a:spLocks noGrp="1"/>
+          </p:cNvSpPr>
+          <p:nvPr>
+            <p:ph idx="1"/>
+          </p:nvPr>
+        </p:nvSpPr>
+        <p:spPr/>
+        <p:txBody>
+          <a:bodyPr/>
+          <a:lstStyle/>
+          <a:p>
+            <a:endParaRPr lang="it-IT"/>
+          </a:p>
+        </p:txBody>
+      </p:sp>
     </p:spTree>
     <p:extLst>
       <p:ext uri="{BB962C8B-B14F-4D97-AF65-F5344CB8AC3E}">
-        <p14:creationId xmlns:p14="http://schemas.microsoft.com/office/powerpoint/2010/main" val="1194386226"/>
+        <p14:creationId xmlns:p14="http://schemas.microsoft.com/office/powerpoint/2010/main" val="1009496160"/>
       </p:ext>
     </p:extLst>
   </p:cSld>
@@ -11574,49 +11599,12 @@
           <a:chExt cx="0" cy="0"/>
         </a:xfrm>
       </p:grpSpPr>
-      <p:pic>
-        <p:nvPicPr>
-          <p:cNvPr id="6" name="Immagine 5">
-            <a:extLst>
-              <a:ext uri="{FF2B5EF4-FFF2-40B4-BE49-F238E27FC236}">
-                <a16:creationId xmlns:a16="http://schemas.microsoft.com/office/drawing/2014/main" id="{647AC981-8FC9-12DC-FE0E-FA269B095F4F}"/>
-              </a:ext>
-            </a:extLst>
-          </p:cNvPr>
-          <p:cNvPicPr>
-            <a:picLocks noChangeAspect="1"/>
-          </p:cNvPicPr>
-          <p:nvPr/>
-        </p:nvPicPr>
-        <p:blipFill>
-          <a:blip r:embed="rId2">
-            <a:extLst>
-              <a:ext uri="{28A0092B-C50C-407E-A947-70E740481C1C}">
-                <a14:useLocalDpi xmlns:a14="http://schemas.microsoft.com/office/drawing/2010/main" val="0"/>
-              </a:ext>
-            </a:extLst>
-          </a:blip>
-          <a:srcRect l="2720"/>
-          <a:stretch>
-            <a:fillRect/>
-          </a:stretch>
-        </p:blipFill>
-        <p:spPr>
-          <a:xfrm>
-            <a:off x="805475" y="1196281"/>
-            <a:ext cx="10581050" cy="4668188"/>
-          </a:xfrm>
-          <a:prstGeom prst="rect">
-            <a:avLst/>
-          </a:prstGeom>
-        </p:spPr>
-      </p:pic>
-      <p:sp>
-        <p:nvSpPr>
-          <p:cNvPr id="4" name="Titolo 1">
-            <a:extLst>
-              <a:ext uri="{FF2B5EF4-FFF2-40B4-BE49-F238E27FC236}">
-                <a16:creationId xmlns:a16="http://schemas.microsoft.com/office/drawing/2014/main" id="{00BF9DF0-03D3-0DDC-B153-3E3D21E89B24}"/>
+      <p:sp>
+        <p:nvSpPr>
+          <p:cNvPr id="2" name="Titolo 1">
+            <a:extLst>
+              <a:ext uri="{FF2B5EF4-FFF2-40B4-BE49-F238E27FC236}">
+                <a16:creationId xmlns:a16="http://schemas.microsoft.com/office/drawing/2014/main" id="{BD9A8F3E-8C98-B128-B40B-053421F25415}"/>
               </a:ext>
             </a:extLst>
           </p:cNvPr>
@@ -11627,63 +11615,56 @@
             <p:ph type="title"/>
           </p:nvPr>
         </p:nvSpPr>
-        <p:spPr>
-          <a:xfrm>
-            <a:off x="0" y="249727"/>
-            <a:ext cx="11661775" cy="606425"/>
-          </a:xfrm>
-        </p:spPr>
+        <p:spPr/>
         <p:txBody>
           <a:bodyPr/>
           <a:lstStyle/>
           <a:p>
             <a:r>
               <a:rPr lang="it-IT" dirty="0"/>
-              <a:t>Misure di fase FPGA – STM32 su fibra urbana </a:t>
+              <a:t>PSD SOP con diversi livelli di Pin</a:t>
+            </a:r>
+          </a:p>
+        </p:txBody>
+      </p:sp>
+      <p:sp>
+        <p:nvSpPr>
+          <p:cNvPr id="3" name="Segnaposto contenuto 2">
+            <a:extLst>
+              <a:ext uri="{FF2B5EF4-FFF2-40B4-BE49-F238E27FC236}">
+                <a16:creationId xmlns:a16="http://schemas.microsoft.com/office/drawing/2014/main" id="{EC9CA506-91AB-EA7F-5507-C15F52F9F8DC}"/>
+              </a:ext>
+            </a:extLst>
+          </p:cNvPr>
+          <p:cNvSpPr>
+            <a:spLocks noGrp="1"/>
+          </p:cNvSpPr>
+          <p:nvPr>
+            <p:ph idx="1"/>
+          </p:nvPr>
+        </p:nvSpPr>
+        <p:spPr/>
+        <p:txBody>
+          <a:bodyPr/>
+          <a:lstStyle/>
+          <a:p>
+            <a:r>
+              <a:rPr lang="it-IT" dirty="0"/>
+              <a:t>Sfera </a:t>
             </a:r>
             <a:r>
               <a:rPr lang="it-IT" dirty="0" err="1"/>
-              <a:t>INRiM</a:t>
+              <a:t>poincare</a:t>
             </a:r>
             <a:endParaRPr lang="it-IT" dirty="0"/>
           </a:p>
-        </p:txBody>
-      </p:sp>
-      <p:sp>
-        <p:nvSpPr>
-          <p:cNvPr id="2" name="CasellaDiTesto 1">
-            <a:extLst>
-              <a:ext uri="{FF2B5EF4-FFF2-40B4-BE49-F238E27FC236}">
-                <a16:creationId xmlns:a16="http://schemas.microsoft.com/office/drawing/2014/main" id="{17E5E999-9757-E691-7B50-82ADDC88A082}"/>
-              </a:ext>
-            </a:extLst>
-          </p:cNvPr>
-          <p:cNvSpPr txBox="1"/>
-          <p:nvPr/>
-        </p:nvSpPr>
-        <p:spPr>
-          <a:xfrm>
-            <a:off x="5920740" y="6434160"/>
-            <a:ext cx="350520" cy="369332"/>
-          </a:xfrm>
-          <a:prstGeom prst="rect">
-            <a:avLst/>
-          </a:prstGeom>
-          <a:noFill/>
-        </p:spPr>
-        <p:txBody>
-          <a:bodyPr wrap="square" rtlCol="0">
-            <a:spAutoFit/>
-          </a:bodyPr>
-          <a:lstStyle/>
-          <a:p>
-            <a:r>
-              <a:rPr lang="en-GB" dirty="0">
-                <a:solidFill>
-                  <a:schemeClr val="bg1"/>
-                </a:solidFill>
-              </a:rPr>
-              <a:t>8</a:t>
+          <a:p>
+            <a:endParaRPr lang="it-IT" dirty="0"/>
+          </a:p>
+          <a:p>
+            <a:r>
+              <a:rPr lang="it-IT" dirty="0"/>
+              <a:t> </a:t>
             </a:r>
           </a:p>
         </p:txBody>
@@ -11691,7 +11672,7 @@
     </p:spTree>
     <p:extLst>
       <p:ext uri="{BB962C8B-B14F-4D97-AF65-F5344CB8AC3E}">
-        <p14:creationId xmlns:p14="http://schemas.microsoft.com/office/powerpoint/2010/main" val="4120565418"/>
+        <p14:creationId xmlns:p14="http://schemas.microsoft.com/office/powerpoint/2010/main" val="2061641021"/>
       </p:ext>
     </p:extLst>
   </p:cSld>
@@ -11723,7 +11704,7 @@
           <p:cNvPr id="2" name="Titolo 1">
             <a:extLst>
               <a:ext uri="{FF2B5EF4-FFF2-40B4-BE49-F238E27FC236}">
-                <a16:creationId xmlns:a16="http://schemas.microsoft.com/office/drawing/2014/main" id="{6B1F2CD7-C054-4178-C821-FD11F38DE8D8}"/>
+                <a16:creationId xmlns:a16="http://schemas.microsoft.com/office/drawing/2014/main" id="{450B4821-3306-2825-F659-BCD540293CBF}"/>
               </a:ext>
             </a:extLst>
           </p:cNvPr>
@@ -11741,96 +11722,40 @@
           <a:p>
             <a:r>
               <a:rPr lang="it-IT" dirty="0"/>
-              <a:t>Misure di fase FPGA – STM32 su fibra urbana </a:t>
-            </a:r>
-            <a:r>
-              <a:rPr lang="it-IT" dirty="0" err="1"/>
-              <a:t>INRiM</a:t>
-            </a:r>
-            <a:endParaRPr lang="it-IT" dirty="0"/>
-          </a:p>
-        </p:txBody>
-      </p:sp>
-      <p:sp>
-        <p:nvSpPr>
-          <p:cNvPr id="5" name="CasellaDiTesto 4">
-            <a:extLst>
-              <a:ext uri="{FF2B5EF4-FFF2-40B4-BE49-F238E27FC236}">
-                <a16:creationId xmlns:a16="http://schemas.microsoft.com/office/drawing/2014/main" id="{ABBF30F4-7C2A-7DB2-95D6-0885FA5D6C19}"/>
-              </a:ext>
-            </a:extLst>
-          </p:cNvPr>
-          <p:cNvSpPr txBox="1"/>
-          <p:nvPr/>
-        </p:nvSpPr>
-        <p:spPr>
-          <a:xfrm>
-            <a:off x="5920740" y="6434160"/>
-            <a:ext cx="723900" cy="369332"/>
-          </a:xfrm>
-          <a:prstGeom prst="rect">
-            <a:avLst/>
-          </a:prstGeom>
-          <a:noFill/>
-        </p:spPr>
-        <p:txBody>
-          <a:bodyPr wrap="square" rtlCol="0">
-            <a:spAutoFit/>
-          </a:bodyPr>
-          <a:lstStyle/>
-          <a:p>
-            <a:r>
-              <a:rPr lang="en-GB" dirty="0">
-                <a:solidFill>
-                  <a:schemeClr val="bg1"/>
-                </a:solidFill>
-              </a:rPr>
-              <a:t>14</a:t>
-            </a:r>
-          </a:p>
-        </p:txBody>
-      </p:sp>
-      <p:pic>
-        <p:nvPicPr>
-          <p:cNvPr id="6" name="Immagine 5">
-            <a:extLst>
-              <a:ext uri="{FF2B5EF4-FFF2-40B4-BE49-F238E27FC236}">
-                <a16:creationId xmlns:a16="http://schemas.microsoft.com/office/drawing/2014/main" id="{E5F14973-B645-5CB4-9135-3FF42CFBEEFB}"/>
-              </a:ext>
-            </a:extLst>
-          </p:cNvPr>
-          <p:cNvPicPr>
-            <a:picLocks noChangeAspect="1"/>
-          </p:cNvPicPr>
-          <p:nvPr/>
-        </p:nvPicPr>
-        <p:blipFill>
-          <a:blip r:embed="rId2">
-            <a:extLst>
-              <a:ext uri="{28A0092B-C50C-407E-A947-70E740481C1C}">
-                <a14:useLocalDpi xmlns:a14="http://schemas.microsoft.com/office/drawing/2010/main" val="0"/>
-              </a:ext>
-            </a:extLst>
-          </a:blip>
-          <a:srcRect l="5792" t="8346" r="7316" b="4298"/>
-          <a:stretch>
-            <a:fillRect/>
-          </a:stretch>
-        </p:blipFill>
-        <p:spPr>
-          <a:xfrm>
-            <a:off x="1301261" y="896814"/>
-            <a:ext cx="9363809" cy="5240217"/>
-          </a:xfrm>
-          <a:prstGeom prst="rect">
-            <a:avLst/>
-          </a:prstGeom>
-        </p:spPr>
-      </p:pic>
+              <a:t>PSD SOP diversi valori di ATE</a:t>
+            </a:r>
+          </a:p>
+        </p:txBody>
+      </p:sp>
+      <p:sp>
+        <p:nvSpPr>
+          <p:cNvPr id="3" name="Segnaposto contenuto 2">
+            <a:extLst>
+              <a:ext uri="{FF2B5EF4-FFF2-40B4-BE49-F238E27FC236}">
+                <a16:creationId xmlns:a16="http://schemas.microsoft.com/office/drawing/2014/main" id="{8A523D95-9A85-051C-4B65-64C702150715}"/>
+              </a:ext>
+            </a:extLst>
+          </p:cNvPr>
+          <p:cNvSpPr>
+            <a:spLocks noGrp="1"/>
+          </p:cNvSpPr>
+          <p:nvPr>
+            <p:ph idx="1"/>
+          </p:nvPr>
+        </p:nvSpPr>
+        <p:spPr/>
+        <p:txBody>
+          <a:bodyPr/>
+          <a:lstStyle/>
+          <a:p>
+            <a:endParaRPr lang="it-IT"/>
+          </a:p>
+        </p:txBody>
+      </p:sp>
     </p:spTree>
     <p:extLst>
       <p:ext uri="{BB962C8B-B14F-4D97-AF65-F5344CB8AC3E}">
-        <p14:creationId xmlns:p14="http://schemas.microsoft.com/office/powerpoint/2010/main" val="2354069701"/>
+        <p14:creationId xmlns:p14="http://schemas.microsoft.com/office/powerpoint/2010/main" val="3775798004"/>
       </p:ext>
     </p:extLst>
   </p:cSld>
@@ -11845,13 +11770,7 @@
   <p:cSld>
     <p:spTree>
       <p:nvGrpSpPr>
-        <p:cNvPr id="1" name="">
-          <a:extLst>
-            <a:ext uri="{FF2B5EF4-FFF2-40B4-BE49-F238E27FC236}">
-              <a16:creationId xmlns:a16="http://schemas.microsoft.com/office/drawing/2014/main" id="{EFC9421F-36CE-9E41-BD55-CABDD87B2528}"/>
-            </a:ext>
-          </a:extLst>
-        </p:cNvPr>
+        <p:cNvPr id="1" name=""/>
         <p:cNvGrpSpPr/>
         <p:nvPr/>
       </p:nvGrpSpPr>
@@ -11865,10 +11784,10 @@
       </p:grpSpPr>
       <p:sp>
         <p:nvSpPr>
-          <p:cNvPr id="10" name="Titolo 1">
-            <a:extLst>
-              <a:ext uri="{FF2B5EF4-FFF2-40B4-BE49-F238E27FC236}">
-                <a16:creationId xmlns:a16="http://schemas.microsoft.com/office/drawing/2014/main" id="{4F5A25F8-CA57-D29B-066B-A0E6DE7C5742}"/>
+          <p:cNvPr id="2" name="Titolo 1">
+            <a:extLst>
+              <a:ext uri="{FF2B5EF4-FFF2-40B4-BE49-F238E27FC236}">
+                <a16:creationId xmlns:a16="http://schemas.microsoft.com/office/drawing/2014/main" id="{7E8CC921-DB12-AE60-A7DE-3F2F69DF05D1}"/>
               </a:ext>
             </a:extLst>
           </p:cNvPr>
@@ -11879,189 +11798,47 @@
             <p:ph type="title"/>
           </p:nvPr>
         </p:nvSpPr>
-        <p:spPr>
-          <a:xfrm>
-            <a:off x="266400" y="180000"/>
-            <a:ext cx="11664950" cy="1080000"/>
-          </a:xfrm>
-        </p:spPr>
+        <p:spPr/>
         <p:txBody>
           <a:bodyPr/>
           <a:lstStyle/>
           <a:p>
             <a:r>
               <a:rPr lang="it-IT" dirty="0"/>
-              <a:t>Misure di fase FPGA – STM32 su fibra urbana </a:t>
-            </a:r>
-            <a:r>
-              <a:rPr lang="it-IT" dirty="0" err="1"/>
-              <a:t>INRiM</a:t>
-            </a:r>
-            <a:endParaRPr lang="it-IT" dirty="0"/>
-          </a:p>
-        </p:txBody>
-      </p:sp>
-      <p:sp>
-        <p:nvSpPr>
-          <p:cNvPr id="5" name="CasellaDiTesto 4">
-            <a:extLst>
-              <a:ext uri="{FF2B5EF4-FFF2-40B4-BE49-F238E27FC236}">
-                <a16:creationId xmlns:a16="http://schemas.microsoft.com/office/drawing/2014/main" id="{4D630410-D347-7DF1-19FE-799764A352E3}"/>
-              </a:ext>
-            </a:extLst>
-          </p:cNvPr>
-          <p:cNvSpPr txBox="1"/>
-          <p:nvPr/>
-        </p:nvSpPr>
-        <p:spPr>
-          <a:xfrm>
-            <a:off x="5920740" y="6434160"/>
-            <a:ext cx="459740" cy="369332"/>
-          </a:xfrm>
-          <a:prstGeom prst="rect">
-            <a:avLst/>
-          </a:prstGeom>
-          <a:noFill/>
-        </p:spPr>
-        <p:txBody>
-          <a:bodyPr wrap="square" rtlCol="0">
-            <a:spAutoFit/>
-          </a:bodyPr>
-          <a:lstStyle/>
-          <a:p>
-            <a:r>
-              <a:rPr lang="en-GB" dirty="0">
-                <a:solidFill>
-                  <a:schemeClr val="bg1"/>
-                </a:solidFill>
-              </a:rPr>
-              <a:t>13</a:t>
-            </a:r>
-          </a:p>
-        </p:txBody>
-      </p:sp>
-      <p:pic>
-        <p:nvPicPr>
-          <p:cNvPr id="2" name="Segnaposto contenuto 4">
-            <a:extLst>
-              <a:ext uri="{FF2B5EF4-FFF2-40B4-BE49-F238E27FC236}">
-                <a16:creationId xmlns:a16="http://schemas.microsoft.com/office/drawing/2014/main" id="{7AF3A277-D13E-BB3E-788A-C4A7ED416C35}"/>
-              </a:ext>
-            </a:extLst>
-          </p:cNvPr>
-          <p:cNvPicPr>
-            <a:picLocks noGrp="1" noChangeAspect="1"/>
-          </p:cNvPicPr>
+              <a:t>Quantizzazione</a:t>
+            </a:r>
+          </a:p>
+        </p:txBody>
+      </p:sp>
+      <p:sp>
+        <p:nvSpPr>
+          <p:cNvPr id="3" name="Segnaposto contenuto 2">
+            <a:extLst>
+              <a:ext uri="{FF2B5EF4-FFF2-40B4-BE49-F238E27FC236}">
+                <a16:creationId xmlns:a16="http://schemas.microsoft.com/office/drawing/2014/main" id="{31DA2A48-4642-43C5-A219-D69143989F14}"/>
+              </a:ext>
+            </a:extLst>
+          </p:cNvPr>
+          <p:cNvSpPr>
+            <a:spLocks noGrp="1"/>
+          </p:cNvSpPr>
           <p:nvPr>
             <p:ph idx="1"/>
           </p:nvPr>
-        </p:nvPicPr>
-        <p:blipFill>
-          <a:blip r:embed="rId2">
-            <a:extLst>
-              <a:ext uri="{28A0092B-C50C-407E-A947-70E740481C1C}">
-                <a14:useLocalDpi xmlns:a14="http://schemas.microsoft.com/office/drawing/2010/main" val="0"/>
-              </a:ext>
-            </a:extLst>
-          </a:blip>
-          <a:srcRect l="3082" b="2765"/>
-          <a:stretch>
-            <a:fillRect/>
-          </a:stretch>
-        </p:blipFill>
-        <p:spPr>
-          <a:xfrm>
-            <a:off x="1630503" y="931785"/>
-            <a:ext cx="8930994" cy="4994430"/>
-          </a:xfrm>
-          <a:prstGeom prst="rect">
-            <a:avLst/>
-          </a:prstGeom>
-        </p:spPr>
-      </p:pic>
-      <p:sp>
-        <p:nvSpPr>
-          <p:cNvPr id="3" name="CasellaDiTesto 2">
-            <a:extLst>
-              <a:ext uri="{FF2B5EF4-FFF2-40B4-BE49-F238E27FC236}">
-                <a16:creationId xmlns:a16="http://schemas.microsoft.com/office/drawing/2014/main" id="{7A86DC78-A514-9BE0-8A59-6A68F506E5F9}"/>
-              </a:ext>
-            </a:extLst>
-          </p:cNvPr>
-          <p:cNvSpPr txBox="1"/>
-          <p:nvPr/>
-        </p:nvSpPr>
-        <p:spPr>
-          <a:xfrm>
-            <a:off x="266401" y="5926215"/>
-            <a:ext cx="11603214" cy="338554"/>
-          </a:xfrm>
-          <a:prstGeom prst="rect">
-            <a:avLst/>
-          </a:prstGeom>
-          <a:noFill/>
-        </p:spPr>
-        <p:txBody>
-          <a:bodyPr wrap="square" rtlCol="0">
-            <a:spAutoFit/>
-          </a:bodyPr>
-          <a:lstStyle/>
-          <a:p>
-            <a:pPr algn="ctr"/>
-            <a:r>
-              <a:rPr lang="it-IT" sz="1600" dirty="0"/>
-              <a:t>Reference: </a:t>
-            </a:r>
-            <a:r>
-              <a:rPr lang="it-IT" sz="1600" dirty="0">
-                <a:hlinkClick r:id="rId3" action="ppaction://hlinkfile"/>
-              </a:rPr>
-              <a:t>Donadello et al. - 2023 - Embedded Digital </a:t>
-            </a:r>
-            <a:r>
-              <a:rPr lang="it-IT" sz="1600" dirty="0" err="1">
-                <a:hlinkClick r:id="rId3" action="ppaction://hlinkfile"/>
-              </a:rPr>
-              <a:t>Phase</a:t>
-            </a:r>
-            <a:r>
-              <a:rPr lang="it-IT" sz="1600" dirty="0">
-                <a:hlinkClick r:id="rId3" action="ppaction://hlinkfile"/>
-              </a:rPr>
-              <a:t> </a:t>
-            </a:r>
-            <a:r>
-              <a:rPr lang="it-IT" sz="1600" dirty="0" err="1">
-                <a:hlinkClick r:id="rId3" action="ppaction://hlinkfile"/>
-              </a:rPr>
-              <a:t>Noise</a:t>
-            </a:r>
-            <a:r>
-              <a:rPr lang="it-IT" sz="1600" dirty="0">
-                <a:hlinkClick r:id="rId3" action="ppaction://hlinkfile"/>
-              </a:rPr>
-              <a:t> Analyzer for Optical Frequency </a:t>
-            </a:r>
-            <a:r>
-              <a:rPr lang="it-IT" sz="1600" dirty="0" err="1">
-                <a:hlinkClick r:id="rId3" action="ppaction://hlinkfile"/>
-              </a:rPr>
-              <a:t>Metrology</a:t>
-            </a:r>
-            <a:r>
-              <a:rPr lang="it-IT" sz="1600" dirty="0">
-                <a:hlinkClick r:id="rId3" action="ppaction://hlinkfile"/>
-              </a:rPr>
-              <a:t> </a:t>
-            </a:r>
-            <a:endParaRPr lang="it-IT" sz="1600" dirty="0"/>
+        </p:nvSpPr>
+        <p:spPr/>
+        <p:txBody>
+          <a:bodyPr/>
+          <a:lstStyle/>
+          <a:p>
+            <a:endParaRPr lang="it-IT"/>
           </a:p>
         </p:txBody>
       </p:sp>
     </p:spTree>
     <p:extLst>
       <p:ext uri="{BB962C8B-B14F-4D97-AF65-F5344CB8AC3E}">
-        <p14:creationId xmlns:p14="http://schemas.microsoft.com/office/powerpoint/2010/main" val="4223474480"/>
+        <p14:creationId xmlns:p14="http://schemas.microsoft.com/office/powerpoint/2010/main" val="1377187253"/>
       </p:ext>
     </p:extLst>
   </p:cSld>
@@ -12093,7 +11870,7 @@
           <p:cNvPr id="2" name="Titolo 1">
             <a:extLst>
               <a:ext uri="{FF2B5EF4-FFF2-40B4-BE49-F238E27FC236}">
-                <a16:creationId xmlns:a16="http://schemas.microsoft.com/office/drawing/2014/main" id="{B0DB0904-3B4C-6923-3F41-3A1B8BB72CA2}"/>
+                <a16:creationId xmlns:a16="http://schemas.microsoft.com/office/drawing/2014/main" id="{C8FA1AE1-1A93-602E-1373-D9707F71D0C4}"/>
               </a:ext>
             </a:extLst>
           </p:cNvPr>
@@ -12111,90 +11888,40 @@
           <a:p>
             <a:r>
               <a:rPr lang="it-IT" dirty="0"/>
-              <a:t>FFT sullo zoom con residui</a:t>
-            </a:r>
-          </a:p>
-        </p:txBody>
-      </p:sp>
-      <p:sp>
-        <p:nvSpPr>
-          <p:cNvPr id="3" name="CasellaDiTesto 2">
-            <a:extLst>
-              <a:ext uri="{FF2B5EF4-FFF2-40B4-BE49-F238E27FC236}">
-                <a16:creationId xmlns:a16="http://schemas.microsoft.com/office/drawing/2014/main" id="{6ACB3521-4D40-92CD-E521-7A72547A94A4}"/>
-              </a:ext>
-            </a:extLst>
-          </p:cNvPr>
-          <p:cNvSpPr txBox="1"/>
-          <p:nvPr/>
-        </p:nvSpPr>
-        <p:spPr>
-          <a:xfrm>
-            <a:off x="5920740" y="6434160"/>
-            <a:ext cx="350520" cy="369332"/>
-          </a:xfrm>
-          <a:prstGeom prst="rect">
-            <a:avLst/>
-          </a:prstGeom>
-          <a:noFill/>
-        </p:spPr>
-        <p:txBody>
-          <a:bodyPr wrap="square" rtlCol="0">
-            <a:spAutoFit/>
-          </a:bodyPr>
-          <a:lstStyle/>
-          <a:p>
-            <a:r>
-              <a:rPr lang="en-GB" dirty="0">
-                <a:solidFill>
-                  <a:schemeClr val="bg1"/>
-                </a:solidFill>
-              </a:rPr>
-              <a:t>8</a:t>
-            </a:r>
-          </a:p>
-        </p:txBody>
-      </p:sp>
-      <p:pic>
-        <p:nvPicPr>
-          <p:cNvPr id="10" name="Immagine 9">
-            <a:extLst>
-              <a:ext uri="{FF2B5EF4-FFF2-40B4-BE49-F238E27FC236}">
-                <a16:creationId xmlns:a16="http://schemas.microsoft.com/office/drawing/2014/main" id="{F33FE863-53ED-8D84-9A52-7323AE31EA3F}"/>
-              </a:ext>
-            </a:extLst>
-          </p:cNvPr>
-          <p:cNvPicPr>
-            <a:picLocks noChangeAspect="1"/>
-          </p:cNvPicPr>
-          <p:nvPr/>
-        </p:nvPicPr>
-        <p:blipFill>
-          <a:blip r:embed="rId2">
-            <a:extLst>
-              <a:ext uri="{28A0092B-C50C-407E-A947-70E740481C1C}">
-                <a14:useLocalDpi xmlns:a14="http://schemas.microsoft.com/office/drawing/2010/main" val="0"/>
-              </a:ext>
-            </a:extLst>
-          </a:blip>
-          <a:stretch>
-            <a:fillRect/>
-          </a:stretch>
-        </p:blipFill>
-        <p:spPr>
-          <a:xfrm>
-            <a:off x="1574987" y="1064974"/>
-            <a:ext cx="9042026" cy="5033159"/>
-          </a:xfrm>
-          <a:prstGeom prst="rect">
-            <a:avLst/>
-          </a:prstGeom>
-        </p:spPr>
-      </p:pic>
+              <a:t>Rete urbana</a:t>
+            </a:r>
+          </a:p>
+        </p:txBody>
+      </p:sp>
+      <p:sp>
+        <p:nvSpPr>
+          <p:cNvPr id="3" name="Segnaposto contenuto 2">
+            <a:extLst>
+              <a:ext uri="{FF2B5EF4-FFF2-40B4-BE49-F238E27FC236}">
+                <a16:creationId xmlns:a16="http://schemas.microsoft.com/office/drawing/2014/main" id="{0BB186A3-6FE6-8728-1FDA-73E2A9B3D21D}"/>
+              </a:ext>
+            </a:extLst>
+          </p:cNvPr>
+          <p:cNvSpPr>
+            <a:spLocks noGrp="1"/>
+          </p:cNvSpPr>
+          <p:nvPr>
+            <p:ph idx="1"/>
+          </p:nvPr>
+        </p:nvSpPr>
+        <p:spPr/>
+        <p:txBody>
+          <a:bodyPr/>
+          <a:lstStyle/>
+          <a:p>
+            <a:endParaRPr lang="it-IT"/>
+          </a:p>
+        </p:txBody>
+      </p:sp>
     </p:spTree>
     <p:extLst>
       <p:ext uri="{BB962C8B-B14F-4D97-AF65-F5344CB8AC3E}">
-        <p14:creationId xmlns:p14="http://schemas.microsoft.com/office/powerpoint/2010/main" val="2971382839"/>
+        <p14:creationId xmlns:p14="http://schemas.microsoft.com/office/powerpoint/2010/main" val="950741520"/>
       </p:ext>
     </p:extLst>
   </p:cSld>
@@ -13411,6 +13138,14 @@
 </file>
 
 <file path=customXml/item1.xml><?xml version="1.0" encoding="utf-8"?>
+<p:properties xmlns:p="http://schemas.microsoft.com/office/2006/metadata/properties" xmlns:xsi="http://www.w3.org/2001/XMLSchema-instance" xmlns:pc="http://schemas.microsoft.com/office/infopath/2007/PartnerControls">
+  <documentManagement>
+    <_activity xmlns="e1991b7f-6b7d-449b-b767-f5f786c869d3" xsi:nil="true"/>
+  </documentManagement>
+</p:properties>
+</file>
+
+<file path=customXml/item2.xml><?xml version="1.0" encoding="utf-8"?>
 <ct:contentTypeSchema xmlns:ct="http://schemas.microsoft.com/office/2006/metadata/contentType" xmlns:ma="http://schemas.microsoft.com/office/2006/metadata/properties/metaAttributes" ct:_="" ma:_="" ma:contentTypeName="Document" ma:contentTypeID="0x0101004855725CFF937040894F497962944123" ma:contentTypeVersion="12" ma:contentTypeDescription="Create a new document." ma:contentTypeScope="" ma:versionID="7a0e623862b5493cb3745d6796d6e55f">
   <xsd:schema xmlns:xsd="http://www.w3.org/2001/XMLSchema" xmlns:xs="http://www.w3.org/2001/XMLSchema" xmlns:p="http://schemas.microsoft.com/office/2006/metadata/properties" xmlns:ns3="e1991b7f-6b7d-449b-b767-f5f786c869d3" targetNamespace="http://schemas.microsoft.com/office/2006/metadata/properties" ma:root="true" ma:fieldsID="6c1c622ae9065d5d3394d8a852b1f736" ns3:_="">
     <xsd:import namespace="e1991b7f-6b7d-449b-b767-f5f786c869d3"/>
@@ -13604,7 +13339,7 @@
 </ct:contentTypeSchema>
 </file>
 
-<file path=customXml/item2.xml><?xml version="1.0" encoding="utf-8"?>
+<file path=customXml/item3.xml><?xml version="1.0" encoding="utf-8"?>
 <?mso-contentType ?>
 <FormTemplates xmlns="http://schemas.microsoft.com/sharepoint/v3/contenttype/forms">
   <Display>DocumentLibraryForm</Display>
@@ -13613,15 +13348,23 @@
 </FormTemplates>
 </file>
 
-<file path=customXml/item3.xml><?xml version="1.0" encoding="utf-8"?>
-<p:properties xmlns:p="http://schemas.microsoft.com/office/2006/metadata/properties" xmlns:xsi="http://www.w3.org/2001/XMLSchema-instance" xmlns:pc="http://schemas.microsoft.com/office/infopath/2007/PartnerControls">
-  <documentManagement>
-    <_activity xmlns="e1991b7f-6b7d-449b-b767-f5f786c869d3" xsi:nil="true"/>
-  </documentManagement>
-</p:properties>
+<file path=customXml/itemProps1.xml><?xml version="1.0" encoding="utf-8"?>
+<ds:datastoreItem xmlns:ds="http://schemas.openxmlformats.org/officeDocument/2006/customXml" ds:itemID="{2CABA873-0994-4738-95F5-BEAE2390D7EB}">
+  <ds:schemaRefs>
+    <ds:schemaRef ds:uri="http://schemas.microsoft.com/office/2006/documentManagement/types"/>
+    <ds:schemaRef ds:uri="http://purl.org/dc/elements/1.1/"/>
+    <ds:schemaRef ds:uri="http://schemas.microsoft.com/office/2006/metadata/properties"/>
+    <ds:schemaRef ds:uri="http://purl.org/dc/terms/"/>
+    <ds:schemaRef ds:uri="http://schemas.openxmlformats.org/package/2006/metadata/core-properties"/>
+    <ds:schemaRef ds:uri="http://www.w3.org/XML/1998/namespace"/>
+    <ds:schemaRef ds:uri="http://schemas.microsoft.com/office/infopath/2007/PartnerControls"/>
+    <ds:schemaRef ds:uri="e1991b7f-6b7d-449b-b767-f5f786c869d3"/>
+    <ds:schemaRef ds:uri="http://purl.org/dc/dcmitype/"/>
+  </ds:schemaRefs>
+</ds:datastoreItem>
 </file>
 
-<file path=customXml/itemProps1.xml><?xml version="1.0" encoding="utf-8"?>
+<file path=customXml/itemProps2.xml><?xml version="1.0" encoding="utf-8"?>
 <ds:datastoreItem xmlns:ds="http://schemas.openxmlformats.org/officeDocument/2006/customXml" ds:itemID="{FEA029C0-35CF-4CF5-BA61-F48A3501E860}">
   <ds:schemaRefs>
     <ds:schemaRef ds:uri="http://schemas.microsoft.com/office/2006/metadata/contentType"/>
@@ -13639,26 +13382,10 @@
 </ds:datastoreItem>
 </file>
 
-<file path=customXml/itemProps2.xml><?xml version="1.0" encoding="utf-8"?>
+<file path=customXml/itemProps3.xml><?xml version="1.0" encoding="utf-8"?>
 <ds:datastoreItem xmlns:ds="http://schemas.openxmlformats.org/officeDocument/2006/customXml" ds:itemID="{C49F161D-94DE-4FB8-B032-342C52D425B3}">
   <ds:schemaRefs>
     <ds:schemaRef ds:uri="http://schemas.microsoft.com/sharepoint/v3/contenttype/forms"/>
   </ds:schemaRefs>
 </ds:datastoreItem>
-</file>
-
-<file path=customXml/itemProps3.xml><?xml version="1.0" encoding="utf-8"?>
-<ds:datastoreItem xmlns:ds="http://schemas.openxmlformats.org/officeDocument/2006/customXml" ds:itemID="{2CABA873-0994-4738-95F5-BEAE2390D7EB}">
-  <ds:schemaRefs>
-    <ds:schemaRef ds:uri="http://schemas.microsoft.com/office/2006/metadata/properties"/>
-    <ds:schemaRef ds:uri="http://schemas.microsoft.com/office/2006/documentManagement/types"/>
-    <ds:schemaRef ds:uri="http://schemas.microsoft.com/office/infopath/2007/PartnerControls"/>
-    <ds:schemaRef ds:uri="http://purl.org/dc/dcmitype/"/>
-    <ds:schemaRef ds:uri="http://schemas.openxmlformats.org/package/2006/metadata/core-properties"/>
-    <ds:schemaRef ds:uri="http://purl.org/dc/elements/1.1/"/>
-    <ds:schemaRef ds:uri="e1991b7f-6b7d-449b-b767-f5f786c869d3"/>
-    <ds:schemaRef ds:uri="http://www.w3.org/XML/1998/namespace"/>
-    <ds:schemaRef ds:uri="http://purl.org/dc/terms/"/>
-  </ds:schemaRefs>
-</ds:datastoreItem>
 </file>